--- a/Basics_of_Automotive.pptx
+++ b/Basics_of_Automotive.pptx
@@ -9,11 +9,14 @@
     <p:sldId id="258" r:id="rId3"/>
     <p:sldId id="259" r:id="rId4"/>
     <p:sldId id="260" r:id="rId5"/>
-    <p:sldId id="261" r:id="rId6"/>
-    <p:sldId id="283" r:id="rId7"/>
+    <p:sldId id="284" r:id="rId6"/>
+    <p:sldId id="261" r:id="rId7"/>
     <p:sldId id="262" r:id="rId8"/>
-    <p:sldId id="275" r:id="rId9"/>
-    <p:sldId id="284" r:id="rId10"/>
+    <p:sldId id="283" r:id="rId9"/>
+    <p:sldId id="286" r:id="rId10"/>
+    <p:sldId id="285" r:id="rId11"/>
+    <p:sldId id="287" r:id="rId12"/>
+    <p:sldId id="275" r:id="rId13"/>
   </p:sldIdLst>
   <p:sldSz cx="9144000" cy="6858000" type="screen4x3"/>
   <p:notesSz cx="6858000" cy="9144000"/>
@@ -134,12 +137,501 @@
 <file path=ppt/revisionInfo.xml><?xml version="1.0" encoding="utf-8"?>
 <p1510:revInfo xmlns:a="http://schemas.openxmlformats.org/drawingml/2006/main" xmlns:r="http://schemas.openxmlformats.org/officeDocument/2006/relationships" xmlns:p1510="http://schemas.microsoft.com/office/powerpoint/2015/10/main">
   <p1510:revLst>
-    <p1510:client id="{7D848F1F-CC30-2B6A-47AE-FC5D9B63316C}" v="77" dt="2026-05-24T11:30:59.902"/>
-    <p1510:client id="{A33AE10D-31B7-400E-9F77-15E7B9AF113A}" v="4" dt="2026-05-25T09:50:13"/>
-    <p1510:client id="{AE9F1034-0DFF-47C0-0227-045ACC151FE2}" v="180" dt="2026-05-25T03:46:50.136"/>
-    <p1510:client id="{BE79AEB5-387B-E49F-F590-6A58E4DB5EF0}" v="87" dt="2026-05-25T09:48:07.949"/>
+    <p1510:client id="{765FDFDF-F184-489D-96D5-EF205B56EEB3}" v="60" dt="2026-05-28T06:51:56.355"/>
   </p1510:revLst>
 </p1510:revInfo>
+</file>
+
+<file path=ppt/changesInfos/changesInfo1.xml><?xml version="1.0" encoding="utf-8"?>
+<pc:chgInfo xmlns:a="http://schemas.openxmlformats.org/drawingml/2006/main" xmlns:r="http://schemas.openxmlformats.org/officeDocument/2006/relationships" xmlns:ac="http://schemas.microsoft.com/office/drawing/2013/main/command" xmlns:pc="http://schemas.microsoft.com/office/powerpoint/2013/main/command">
+  <pc:docChgLst>
+    <pc:chgData name="Sutar, Monal Gajanan (Cognizant)" userId="cbef091d-1278-48f6-97ae-0b476c410a24" providerId="ADAL" clId="{69AB6919-4147-41D2-8237-888729AF7CC5}"/>
+    <pc:docChg chg="undo custSel addSld delSld modSld sldOrd">
+      <pc:chgData name="Sutar, Monal Gajanan (Cognizant)" userId="cbef091d-1278-48f6-97ae-0b476c410a24" providerId="ADAL" clId="{69AB6919-4147-41D2-8237-888729AF7CC5}" dt="2026-05-28T09:22:34.061" v="452" actId="14100"/>
+      <pc:docMkLst>
+        <pc:docMk/>
+      </pc:docMkLst>
+      <pc:sldChg chg="delSp modSp mod">
+        <pc:chgData name="Sutar, Monal Gajanan (Cognizant)" userId="cbef091d-1278-48f6-97ae-0b476c410a24" providerId="ADAL" clId="{69AB6919-4147-41D2-8237-888729AF7CC5}" dt="2026-05-28T09:21:57.425" v="448" actId="1076"/>
+        <pc:sldMkLst>
+          <pc:docMk/>
+          <pc:sldMk cId="0" sldId="259"/>
+        </pc:sldMkLst>
+        <pc:spChg chg="mod">
+          <ac:chgData name="Sutar, Monal Gajanan (Cognizant)" userId="cbef091d-1278-48f6-97ae-0b476c410a24" providerId="ADAL" clId="{69AB6919-4147-41D2-8237-888729AF7CC5}" dt="2026-05-28T09:21:57.425" v="448" actId="1076"/>
+          <ac:spMkLst>
+            <pc:docMk/>
+            <pc:sldMk cId="0" sldId="259"/>
+            <ac:spMk id="3" creationId="{00000000-0000-0000-0000-000000000000}"/>
+          </ac:spMkLst>
+        </pc:spChg>
+        <pc:spChg chg="del">
+          <ac:chgData name="Sutar, Monal Gajanan (Cognizant)" userId="cbef091d-1278-48f6-97ae-0b476c410a24" providerId="ADAL" clId="{69AB6919-4147-41D2-8237-888729AF7CC5}" dt="2026-05-28T09:20:52.069" v="433" actId="478"/>
+          <ac:spMkLst>
+            <pc:docMk/>
+            <pc:sldMk cId="0" sldId="259"/>
+            <ac:spMk id="117" creationId="{DD14DF24-B7D3-924D-E001-8489C6A1CFEB}"/>
+          </ac:spMkLst>
+        </pc:spChg>
+        <pc:picChg chg="mod ord">
+          <ac:chgData name="Sutar, Monal Gajanan (Cognizant)" userId="cbef091d-1278-48f6-97ae-0b476c410a24" providerId="ADAL" clId="{69AB6919-4147-41D2-8237-888729AF7CC5}" dt="2026-05-28T09:21:50.277" v="447" actId="1076"/>
+          <ac:picMkLst>
+            <pc:docMk/>
+            <pc:sldMk cId="0" sldId="259"/>
+            <ac:picMk id="104" creationId="{12679D27-69EB-D565-E598-4AD9AFF0BC07}"/>
+          </ac:picMkLst>
+        </pc:picChg>
+      </pc:sldChg>
+      <pc:sldChg chg="modSp mod">
+        <pc:chgData name="Sutar, Monal Gajanan (Cognizant)" userId="cbef091d-1278-48f6-97ae-0b476c410a24" providerId="ADAL" clId="{69AB6919-4147-41D2-8237-888729AF7CC5}" dt="2026-05-28T06:33:17.814" v="353" actId="29295"/>
+        <pc:sldMkLst>
+          <pc:docMk/>
+          <pc:sldMk cId="0" sldId="260"/>
+        </pc:sldMkLst>
+        <pc:spChg chg="mod">
+          <ac:chgData name="Sutar, Monal Gajanan (Cognizant)" userId="cbef091d-1278-48f6-97ae-0b476c410a24" providerId="ADAL" clId="{69AB6919-4147-41D2-8237-888729AF7CC5}" dt="2026-05-28T06:32:17.935" v="345" actId="113"/>
+          <ac:spMkLst>
+            <pc:docMk/>
+            <pc:sldMk cId="0" sldId="260"/>
+            <ac:spMk id="3" creationId="{00000000-0000-0000-0000-000000000000}"/>
+          </ac:spMkLst>
+        </pc:spChg>
+        <pc:picChg chg="mod ord">
+          <ac:chgData name="Sutar, Monal Gajanan (Cognizant)" userId="cbef091d-1278-48f6-97ae-0b476c410a24" providerId="ADAL" clId="{69AB6919-4147-41D2-8237-888729AF7CC5}" dt="2026-05-28T06:33:17.814" v="353" actId="29295"/>
+          <ac:picMkLst>
+            <pc:docMk/>
+            <pc:sldMk cId="0" sldId="260"/>
+            <ac:picMk id="5" creationId="{AE5FEB30-A973-FF54-1D55-CEFB2BED85AB}"/>
+          </ac:picMkLst>
+        </pc:picChg>
+      </pc:sldChg>
+      <pc:sldChg chg="addSp delSp modSp mod modClrScheme chgLayout">
+        <pc:chgData name="Sutar, Monal Gajanan (Cognizant)" userId="cbef091d-1278-48f6-97ae-0b476c410a24" providerId="ADAL" clId="{69AB6919-4147-41D2-8237-888729AF7CC5}" dt="2026-05-28T09:22:34.061" v="452" actId="14100"/>
+        <pc:sldMkLst>
+          <pc:docMk/>
+          <pc:sldMk cId="0" sldId="261"/>
+        </pc:sldMkLst>
+        <pc:spChg chg="mod">
+          <ac:chgData name="Sutar, Monal Gajanan (Cognizant)" userId="cbef091d-1278-48f6-97ae-0b476c410a24" providerId="ADAL" clId="{69AB6919-4147-41D2-8237-888729AF7CC5}" dt="2026-05-28T06:52:19.663" v="421" actId="26606"/>
+          <ac:spMkLst>
+            <pc:docMk/>
+            <pc:sldMk cId="0" sldId="261"/>
+            <ac:spMk id="2" creationId="{00000000-0000-0000-0000-000000000000}"/>
+          </ac:spMkLst>
+        </pc:spChg>
+        <pc:spChg chg="mod">
+          <ac:chgData name="Sutar, Monal Gajanan (Cognizant)" userId="cbef091d-1278-48f6-97ae-0b476c410a24" providerId="ADAL" clId="{69AB6919-4147-41D2-8237-888729AF7CC5}" dt="2026-05-28T09:22:34.061" v="452" actId="14100"/>
+          <ac:spMkLst>
+            <pc:docMk/>
+            <pc:sldMk cId="0" sldId="261"/>
+            <ac:spMk id="3" creationId="{00000000-0000-0000-0000-000000000000}"/>
+          </ac:spMkLst>
+        </pc:spChg>
+        <pc:spChg chg="add del mod">
+          <ac:chgData name="Sutar, Monal Gajanan (Cognizant)" userId="cbef091d-1278-48f6-97ae-0b476c410a24" providerId="ADAL" clId="{69AB6919-4147-41D2-8237-888729AF7CC5}" dt="2026-05-28T09:21:02.363" v="436" actId="478"/>
+          <ac:spMkLst>
+            <pc:docMk/>
+            <pc:sldMk cId="0" sldId="261"/>
+            <ac:spMk id="9" creationId="{EC1E7D02-246C-6990-22BD-82527AC6DB56}"/>
+          </ac:spMkLst>
+        </pc:spChg>
+        <pc:spChg chg="add mod">
+          <ac:chgData name="Sutar, Monal Gajanan (Cognizant)" userId="cbef091d-1278-48f6-97ae-0b476c410a24" providerId="ADAL" clId="{69AB6919-4147-41D2-8237-888729AF7CC5}" dt="2026-05-28T06:52:19.663" v="421" actId="26606"/>
+          <ac:spMkLst>
+            <pc:docMk/>
+            <pc:sldMk cId="0" sldId="261"/>
+            <ac:spMk id="11" creationId="{C5518BD9-96DA-BAEA-934E-18851747C9BE}"/>
+          </ac:spMkLst>
+        </pc:spChg>
+        <pc:spChg chg="add del mod">
+          <ac:chgData name="Sutar, Monal Gajanan (Cognizant)" userId="cbef091d-1278-48f6-97ae-0b476c410a24" providerId="ADAL" clId="{69AB6919-4147-41D2-8237-888729AF7CC5}" dt="2026-05-28T09:21:10.353" v="437" actId="478"/>
+          <ac:spMkLst>
+            <pc:docMk/>
+            <pc:sldMk cId="0" sldId="261"/>
+            <ac:spMk id="13" creationId="{E7239A84-D1FA-A100-1FF5-3BCD30043BCE}"/>
+          </ac:spMkLst>
+        </pc:spChg>
+        <pc:picChg chg="mod">
+          <ac:chgData name="Sutar, Monal Gajanan (Cognizant)" userId="cbef091d-1278-48f6-97ae-0b476c410a24" providerId="ADAL" clId="{69AB6919-4147-41D2-8237-888729AF7CC5}" dt="2026-05-28T06:52:23.563" v="422" actId="1076"/>
+          <ac:picMkLst>
+            <pc:docMk/>
+            <pc:sldMk cId="0" sldId="261"/>
+            <ac:picMk id="4" creationId="{18B5B4EC-F7F6-27E9-D2AE-124A10499D17}"/>
+          </ac:picMkLst>
+        </pc:picChg>
+      </pc:sldChg>
+      <pc:sldChg chg="addSp delSp modSp mod ord">
+        <pc:chgData name="Sutar, Monal Gajanan (Cognizant)" userId="cbef091d-1278-48f6-97ae-0b476c410a24" providerId="ADAL" clId="{69AB6919-4147-41D2-8237-888729AF7CC5}" dt="2026-05-28T06:33:37.059" v="355"/>
+        <pc:sldMkLst>
+          <pc:docMk/>
+          <pc:sldMk cId="0" sldId="262"/>
+        </pc:sldMkLst>
+        <pc:spChg chg="mod">
+          <ac:chgData name="Sutar, Monal Gajanan (Cognizant)" userId="cbef091d-1278-48f6-97ae-0b476c410a24" providerId="ADAL" clId="{69AB6919-4147-41D2-8237-888729AF7CC5}" dt="2026-05-28T06:27:46.416" v="318" actId="27636"/>
+          <ac:spMkLst>
+            <pc:docMk/>
+            <pc:sldMk cId="0" sldId="262"/>
+            <ac:spMk id="3" creationId="{00000000-0000-0000-0000-000000000000}"/>
+          </ac:spMkLst>
+        </pc:spChg>
+        <pc:spChg chg="del">
+          <ac:chgData name="Sutar, Monal Gajanan (Cognizant)" userId="cbef091d-1278-48f6-97ae-0b476c410a24" providerId="ADAL" clId="{69AB6919-4147-41D2-8237-888729AF7CC5}" dt="2026-05-28T06:26:52.324" v="302" actId="478"/>
+          <ac:spMkLst>
+            <pc:docMk/>
+            <pc:sldMk cId="0" sldId="262"/>
+            <ac:spMk id="5" creationId="{78C672AC-A2EE-F69D-F380-EF3F99CC12FA}"/>
+          </ac:spMkLst>
+        </pc:spChg>
+        <pc:spChg chg="del mod">
+          <ac:chgData name="Sutar, Monal Gajanan (Cognizant)" userId="cbef091d-1278-48f6-97ae-0b476c410a24" providerId="ADAL" clId="{69AB6919-4147-41D2-8237-888729AF7CC5}" dt="2026-05-28T06:26:59.747" v="304" actId="478"/>
+          <ac:spMkLst>
+            <pc:docMk/>
+            <pc:sldMk cId="0" sldId="262"/>
+            <ac:spMk id="6" creationId="{B7B50499-D078-9A48-921D-085327CE4579}"/>
+          </ac:spMkLst>
+        </pc:spChg>
+        <pc:spChg chg="del">
+          <ac:chgData name="Sutar, Monal Gajanan (Cognizant)" userId="cbef091d-1278-48f6-97ae-0b476c410a24" providerId="ADAL" clId="{69AB6919-4147-41D2-8237-888729AF7CC5}" dt="2026-05-28T06:27:01.539" v="305" actId="478"/>
+          <ac:spMkLst>
+            <pc:docMk/>
+            <pc:sldMk cId="0" sldId="262"/>
+            <ac:spMk id="7" creationId="{368B43A9-5FBF-2A2C-C536-DCBF3D716956}"/>
+          </ac:spMkLst>
+        </pc:spChg>
+        <pc:spChg chg="del">
+          <ac:chgData name="Sutar, Monal Gajanan (Cognizant)" userId="cbef091d-1278-48f6-97ae-0b476c410a24" providerId="ADAL" clId="{69AB6919-4147-41D2-8237-888729AF7CC5}" dt="2026-05-28T06:27:03.459" v="306" actId="478"/>
+          <ac:spMkLst>
+            <pc:docMk/>
+            <pc:sldMk cId="0" sldId="262"/>
+            <ac:spMk id="8" creationId="{EE378AEA-DB09-AC54-C05E-451BEC97F017}"/>
+          </ac:spMkLst>
+        </pc:spChg>
+        <pc:spChg chg="del">
+          <ac:chgData name="Sutar, Monal Gajanan (Cognizant)" userId="cbef091d-1278-48f6-97ae-0b476c410a24" providerId="ADAL" clId="{69AB6919-4147-41D2-8237-888729AF7CC5}" dt="2026-05-28T06:27:05.456" v="307" actId="478"/>
+          <ac:spMkLst>
+            <pc:docMk/>
+            <pc:sldMk cId="0" sldId="262"/>
+            <ac:spMk id="9" creationId="{FCF11149-C543-C8E8-1885-E2654F39676E}"/>
+          </ac:spMkLst>
+        </pc:spChg>
+        <pc:spChg chg="del">
+          <ac:chgData name="Sutar, Monal Gajanan (Cognizant)" userId="cbef091d-1278-48f6-97ae-0b476c410a24" providerId="ADAL" clId="{69AB6919-4147-41D2-8237-888729AF7CC5}" dt="2026-05-28T06:27:07.535" v="308" actId="478"/>
+          <ac:spMkLst>
+            <pc:docMk/>
+            <pc:sldMk cId="0" sldId="262"/>
+            <ac:spMk id="10" creationId="{D8B3BEDB-3D1E-052A-4B08-B5432CA35148}"/>
+          </ac:spMkLst>
+        </pc:spChg>
+        <pc:graphicFrameChg chg="add mod">
+          <ac:chgData name="Sutar, Monal Gajanan (Cognizant)" userId="cbef091d-1278-48f6-97ae-0b476c410a24" providerId="ADAL" clId="{69AB6919-4147-41D2-8237-888729AF7CC5}" dt="2026-05-28T06:25:55.857" v="296"/>
+          <ac:graphicFrameMkLst>
+            <pc:docMk/>
+            <pc:sldMk cId="0" sldId="262"/>
+            <ac:graphicFrameMk id="4" creationId="{86DA62C5-071B-3E5A-9248-3EB9BF70876B}"/>
+          </ac:graphicFrameMkLst>
+        </pc:graphicFrameChg>
+      </pc:sldChg>
+      <pc:sldChg chg="delSp mod">
+        <pc:chgData name="Sutar, Monal Gajanan (Cognizant)" userId="cbef091d-1278-48f6-97ae-0b476c410a24" providerId="ADAL" clId="{69AB6919-4147-41D2-8237-888729AF7CC5}" dt="2026-05-28T09:20:46.795" v="432" actId="478"/>
+        <pc:sldMkLst>
+          <pc:docMk/>
+          <pc:sldMk cId="1231602178" sldId="282"/>
+        </pc:sldMkLst>
+        <pc:spChg chg="del">
+          <ac:chgData name="Sutar, Monal Gajanan (Cognizant)" userId="cbef091d-1278-48f6-97ae-0b476c410a24" providerId="ADAL" clId="{69AB6919-4147-41D2-8237-888729AF7CC5}" dt="2026-05-28T09:20:46.795" v="432" actId="478"/>
+          <ac:spMkLst>
+            <pc:docMk/>
+            <pc:sldMk cId="1231602178" sldId="282"/>
+            <ac:spMk id="6" creationId="{919EC831-6615-BF8B-497E-3A525786226F}"/>
+          </ac:spMkLst>
+        </pc:spChg>
+      </pc:sldChg>
+      <pc:sldChg chg="delSp mod">
+        <pc:chgData name="Sutar, Monal Gajanan (Cognizant)" userId="cbef091d-1278-48f6-97ae-0b476c410a24" providerId="ADAL" clId="{69AB6919-4147-41D2-8237-888729AF7CC5}" dt="2026-05-28T09:21:15.653" v="438" actId="478"/>
+        <pc:sldMkLst>
+          <pc:docMk/>
+          <pc:sldMk cId="2277049787" sldId="283"/>
+        </pc:sldMkLst>
+        <pc:spChg chg="del">
+          <ac:chgData name="Sutar, Monal Gajanan (Cognizant)" userId="cbef091d-1278-48f6-97ae-0b476c410a24" providerId="ADAL" clId="{69AB6919-4147-41D2-8237-888729AF7CC5}" dt="2026-05-28T09:21:15.653" v="438" actId="478"/>
+          <ac:spMkLst>
+            <pc:docMk/>
+            <pc:sldMk cId="2277049787" sldId="283"/>
+            <ac:spMk id="4" creationId="{5805283B-F6BC-DC94-79CF-5AEB25D7B574}"/>
+          </ac:spMkLst>
+        </pc:spChg>
+      </pc:sldChg>
+      <pc:sldChg chg="delSp modSp new mod">
+        <pc:chgData name="Sutar, Monal Gajanan (Cognizant)" userId="cbef091d-1278-48f6-97ae-0b476c410a24" providerId="ADAL" clId="{69AB6919-4147-41D2-8237-888729AF7CC5}" dt="2026-05-28T09:20:58.871" v="435" actId="478"/>
+        <pc:sldMkLst>
+          <pc:docMk/>
+          <pc:sldMk cId="3004135814" sldId="284"/>
+        </pc:sldMkLst>
+        <pc:spChg chg="mod">
+          <ac:chgData name="Sutar, Monal Gajanan (Cognizant)" userId="cbef091d-1278-48f6-97ae-0b476c410a24" providerId="ADAL" clId="{69AB6919-4147-41D2-8237-888729AF7CC5}" dt="2026-05-28T06:09:11.645" v="232" actId="20577"/>
+          <ac:spMkLst>
+            <pc:docMk/>
+            <pc:sldMk cId="3004135814" sldId="284"/>
+            <ac:spMk id="2" creationId="{1767B3FA-D35D-2A07-3774-C609A290E7AA}"/>
+          </ac:spMkLst>
+        </pc:spChg>
+        <pc:spChg chg="mod">
+          <ac:chgData name="Sutar, Monal Gajanan (Cognizant)" userId="cbef091d-1278-48f6-97ae-0b476c410a24" providerId="ADAL" clId="{69AB6919-4147-41D2-8237-888729AF7CC5}" dt="2026-05-28T06:28:37.387" v="323" actId="1076"/>
+          <ac:spMkLst>
+            <pc:docMk/>
+            <pc:sldMk cId="3004135814" sldId="284"/>
+            <ac:spMk id="3" creationId="{598C9599-7DF7-A9A8-3194-10690D865EB0}"/>
+          </ac:spMkLst>
+        </pc:spChg>
+        <pc:spChg chg="del">
+          <ac:chgData name="Sutar, Monal Gajanan (Cognizant)" userId="cbef091d-1278-48f6-97ae-0b476c410a24" providerId="ADAL" clId="{69AB6919-4147-41D2-8237-888729AF7CC5}" dt="2026-05-28T09:20:58.871" v="435" actId="478"/>
+          <ac:spMkLst>
+            <pc:docMk/>
+            <pc:sldMk cId="3004135814" sldId="284"/>
+            <ac:spMk id="4" creationId="{75820EF7-09BF-A429-577E-294FF46EECDC}"/>
+          </ac:spMkLst>
+        </pc:spChg>
+        <pc:spChg chg="del">
+          <ac:chgData name="Sutar, Monal Gajanan (Cognizant)" userId="cbef091d-1278-48f6-97ae-0b476c410a24" providerId="ADAL" clId="{69AB6919-4147-41D2-8237-888729AF7CC5}" dt="2026-05-28T09:20:55.608" v="434" actId="478"/>
+          <ac:spMkLst>
+            <pc:docMk/>
+            <pc:sldMk cId="3004135814" sldId="284"/>
+            <ac:spMk id="6" creationId="{D743A210-BFCD-F122-9717-BC5BDC1DDC89}"/>
+          </ac:spMkLst>
+        </pc:spChg>
+      </pc:sldChg>
+      <pc:sldChg chg="addSp delSp modSp new mod ord">
+        <pc:chgData name="Sutar, Monal Gajanan (Cognizant)" userId="cbef091d-1278-48f6-97ae-0b476c410a24" providerId="ADAL" clId="{69AB6919-4147-41D2-8237-888729AF7CC5}" dt="2026-05-28T09:21:27.119" v="442" actId="478"/>
+        <pc:sldMkLst>
+          <pc:docMk/>
+          <pc:sldMk cId="3939511972" sldId="285"/>
+        </pc:sldMkLst>
+        <pc:spChg chg="mod">
+          <ac:chgData name="Sutar, Monal Gajanan (Cognizant)" userId="cbef091d-1278-48f6-97ae-0b476c410a24" providerId="ADAL" clId="{69AB6919-4147-41D2-8237-888729AF7CC5}" dt="2026-05-28T06:12:01.607" v="244" actId="20577"/>
+          <ac:spMkLst>
+            <pc:docMk/>
+            <pc:sldMk cId="3939511972" sldId="285"/>
+            <ac:spMk id="2" creationId="{9C61CD52-7C5A-242D-5E73-B06B16DE43A1}"/>
+          </ac:spMkLst>
+        </pc:spChg>
+        <pc:spChg chg="mod">
+          <ac:chgData name="Sutar, Monal Gajanan (Cognizant)" userId="cbef091d-1278-48f6-97ae-0b476c410a24" providerId="ADAL" clId="{69AB6919-4147-41D2-8237-888729AF7CC5}" dt="2026-05-28T06:27:32.609" v="313" actId="1076"/>
+          <ac:spMkLst>
+            <pc:docMk/>
+            <pc:sldMk cId="3939511972" sldId="285"/>
+            <ac:spMk id="3" creationId="{909C5254-C8E5-D3A6-EA51-8D2ECF2B4A05}"/>
+          </ac:spMkLst>
+        </pc:spChg>
+        <pc:spChg chg="del">
+          <ac:chgData name="Sutar, Monal Gajanan (Cognizant)" userId="cbef091d-1278-48f6-97ae-0b476c410a24" providerId="ADAL" clId="{69AB6919-4147-41D2-8237-888729AF7CC5}" dt="2026-05-28T09:21:23.712" v="441" actId="478"/>
+          <ac:spMkLst>
+            <pc:docMk/>
+            <pc:sldMk cId="3939511972" sldId="285"/>
+            <ac:spMk id="4" creationId="{F2B24B1C-47AB-0002-B37F-A9D4AB5B3F3E}"/>
+          </ac:spMkLst>
+        </pc:spChg>
+        <pc:spChg chg="del">
+          <ac:chgData name="Sutar, Monal Gajanan (Cognizant)" userId="cbef091d-1278-48f6-97ae-0b476c410a24" providerId="ADAL" clId="{69AB6919-4147-41D2-8237-888729AF7CC5}" dt="2026-05-28T09:21:27.119" v="442" actId="478"/>
+          <ac:spMkLst>
+            <pc:docMk/>
+            <pc:sldMk cId="3939511972" sldId="285"/>
+            <ac:spMk id="6" creationId="{44D50C2E-738A-9BD6-3044-16E9ADF1281E}"/>
+          </ac:spMkLst>
+        </pc:spChg>
+        <pc:graphicFrameChg chg="add mod">
+          <ac:chgData name="Sutar, Monal Gajanan (Cognizant)" userId="cbef091d-1278-48f6-97ae-0b476c410a24" providerId="ADAL" clId="{69AB6919-4147-41D2-8237-888729AF7CC5}" dt="2026-05-28T06:11:23.118" v="233"/>
+          <ac:graphicFrameMkLst>
+            <pc:docMk/>
+            <pc:sldMk cId="3939511972" sldId="285"/>
+            <ac:graphicFrameMk id="7" creationId="{C1D6A5B5-B102-76F6-BAF7-85610DCB58AD}"/>
+          </ac:graphicFrameMkLst>
+        </pc:graphicFrameChg>
+      </pc:sldChg>
+      <pc:sldChg chg="addSp delSp modSp new mod modClrScheme chgLayout">
+        <pc:chgData name="Sutar, Monal Gajanan (Cognizant)" userId="cbef091d-1278-48f6-97ae-0b476c410a24" providerId="ADAL" clId="{69AB6919-4147-41D2-8237-888729AF7CC5}" dt="2026-05-28T09:21:20.713" v="440" actId="478"/>
+        <pc:sldMkLst>
+          <pc:docMk/>
+          <pc:sldMk cId="3988782437" sldId="286"/>
+        </pc:sldMkLst>
+        <pc:spChg chg="add del mod ord">
+          <ac:chgData name="Sutar, Monal Gajanan (Cognizant)" userId="cbef091d-1278-48f6-97ae-0b476c410a24" providerId="ADAL" clId="{69AB6919-4147-41D2-8237-888729AF7CC5}" dt="2026-05-28T06:01:31.969" v="173" actId="478"/>
+          <ac:spMkLst>
+            <pc:docMk/>
+            <pc:sldMk cId="3988782437" sldId="286"/>
+            <ac:spMk id="2" creationId="{B8A78B87-3998-CC00-F5EC-E4C7E0AFD812}"/>
+          </ac:spMkLst>
+        </pc:spChg>
+        <pc:spChg chg="mod ord">
+          <ac:chgData name="Sutar, Monal Gajanan (Cognizant)" userId="cbef091d-1278-48f6-97ae-0b476c410a24" providerId="ADAL" clId="{69AB6919-4147-41D2-8237-888729AF7CC5}" dt="2026-05-28T06:01:42.682" v="174" actId="1076"/>
+          <ac:spMkLst>
+            <pc:docMk/>
+            <pc:sldMk cId="3988782437" sldId="286"/>
+            <ac:spMk id="3" creationId="{4D1F2DED-9E0D-DBCE-4453-E91CE4878DC9}"/>
+          </ac:spMkLst>
+        </pc:spChg>
+        <pc:spChg chg="add del mod ord">
+          <ac:chgData name="Sutar, Monal Gajanan (Cognizant)" userId="cbef091d-1278-48f6-97ae-0b476c410a24" providerId="ADAL" clId="{69AB6919-4147-41D2-8237-888729AF7CC5}" dt="2026-05-28T06:21:22.136" v="290" actId="27636"/>
+          <ac:spMkLst>
+            <pc:docMk/>
+            <pc:sldMk cId="3988782437" sldId="286"/>
+            <ac:spMk id="4" creationId="{E0C4B597-B4B5-AF02-9F28-57543F5D85EB}"/>
+          </ac:spMkLst>
+        </pc:spChg>
+        <pc:spChg chg="mod ord">
+          <ac:chgData name="Sutar, Monal Gajanan (Cognizant)" userId="cbef091d-1278-48f6-97ae-0b476c410a24" providerId="ADAL" clId="{69AB6919-4147-41D2-8237-888729AF7CC5}" dt="2026-05-28T06:01:42.682" v="174" actId="1076"/>
+          <ac:spMkLst>
+            <pc:docMk/>
+            <pc:sldMk cId="3988782437" sldId="286"/>
+            <ac:spMk id="5" creationId="{D9A70F05-DE4B-A8BD-C5FD-CF27B097E355}"/>
+          </ac:spMkLst>
+        </pc:spChg>
+        <pc:spChg chg="add del mod ord">
+          <ac:chgData name="Sutar, Monal Gajanan (Cognizant)" userId="cbef091d-1278-48f6-97ae-0b476c410a24" providerId="ADAL" clId="{69AB6919-4147-41D2-8237-888729AF7CC5}" dt="2026-05-28T06:21:22.126" v="289" actId="27636"/>
+          <ac:spMkLst>
+            <pc:docMk/>
+            <pc:sldMk cId="3988782437" sldId="286"/>
+            <ac:spMk id="6" creationId="{2470D853-9BA7-856C-FCB2-938873FB2AEE}"/>
+          </ac:spMkLst>
+        </pc:spChg>
+        <pc:spChg chg="del mod ord">
+          <ac:chgData name="Sutar, Monal Gajanan (Cognizant)" userId="cbef091d-1278-48f6-97ae-0b476c410a24" providerId="ADAL" clId="{69AB6919-4147-41D2-8237-888729AF7CC5}" dt="2026-05-28T06:21:58.720" v="295" actId="478"/>
+          <ac:spMkLst>
+            <pc:docMk/>
+            <pc:sldMk cId="3988782437" sldId="286"/>
+            <ac:spMk id="7" creationId="{805C7F05-EB60-C4D8-13C8-FD00208547AD}"/>
+          </ac:spMkLst>
+        </pc:spChg>
+        <pc:spChg chg="mod ord">
+          <ac:chgData name="Sutar, Monal Gajanan (Cognizant)" userId="cbef091d-1278-48f6-97ae-0b476c410a24" providerId="ADAL" clId="{69AB6919-4147-41D2-8237-888729AF7CC5}" dt="2026-05-28T06:00:00.378" v="153" actId="700"/>
+          <ac:spMkLst>
+            <pc:docMk/>
+            <pc:sldMk cId="3988782437" sldId="286"/>
+            <ac:spMk id="8" creationId="{7FE27AD8-C0AD-79D5-A27A-CBC5BF863AA8}"/>
+          </ac:spMkLst>
+        </pc:spChg>
+        <pc:spChg chg="del mod ord">
+          <ac:chgData name="Sutar, Monal Gajanan (Cognizant)" userId="cbef091d-1278-48f6-97ae-0b476c410a24" providerId="ADAL" clId="{69AB6919-4147-41D2-8237-888729AF7CC5}" dt="2026-05-28T09:21:20.713" v="440" actId="478"/>
+          <ac:spMkLst>
+            <pc:docMk/>
+            <pc:sldMk cId="3988782437" sldId="286"/>
+            <ac:spMk id="9" creationId="{5155048D-6D1D-B3FD-A198-BD28CB4891D8}"/>
+          </ac:spMkLst>
+        </pc:spChg>
+        <pc:spChg chg="add del mod ord">
+          <ac:chgData name="Sutar, Monal Gajanan (Cognizant)" userId="cbef091d-1278-48f6-97ae-0b476c410a24" providerId="ADAL" clId="{69AB6919-4147-41D2-8237-888729AF7CC5}" dt="2026-05-28T06:00:00.378" v="153" actId="700"/>
+          <ac:spMkLst>
+            <pc:docMk/>
+            <pc:sldMk cId="3988782437" sldId="286"/>
+            <ac:spMk id="10" creationId="{FD64D611-7C2F-C21A-F154-ED80169E8259}"/>
+          </ac:spMkLst>
+        </pc:spChg>
+        <pc:spChg chg="add del mod ord">
+          <ac:chgData name="Sutar, Monal Gajanan (Cognizant)" userId="cbef091d-1278-48f6-97ae-0b476c410a24" providerId="ADAL" clId="{69AB6919-4147-41D2-8237-888729AF7CC5}" dt="2026-05-28T05:59:59.961" v="152" actId="700"/>
+          <ac:spMkLst>
+            <pc:docMk/>
+            <pc:sldMk cId="3988782437" sldId="286"/>
+            <ac:spMk id="11" creationId="{86AD1D78-D811-C237-B234-F63A9A9E3388}"/>
+          </ac:spMkLst>
+        </pc:spChg>
+        <pc:spChg chg="add del mod ord">
+          <ac:chgData name="Sutar, Monal Gajanan (Cognizant)" userId="cbef091d-1278-48f6-97ae-0b476c410a24" providerId="ADAL" clId="{69AB6919-4147-41D2-8237-888729AF7CC5}" dt="2026-05-28T05:59:59.961" v="152" actId="700"/>
+          <ac:spMkLst>
+            <pc:docMk/>
+            <pc:sldMk cId="3988782437" sldId="286"/>
+            <ac:spMk id="12" creationId="{350A7113-B580-CB5A-B543-F2E998C6B486}"/>
+          </ac:spMkLst>
+        </pc:spChg>
+        <pc:spChg chg="add del mod ord">
+          <ac:chgData name="Sutar, Monal Gajanan (Cognizant)" userId="cbef091d-1278-48f6-97ae-0b476c410a24" providerId="ADAL" clId="{69AB6919-4147-41D2-8237-888729AF7CC5}" dt="2026-05-28T05:59:59.961" v="152" actId="700"/>
+          <ac:spMkLst>
+            <pc:docMk/>
+            <pc:sldMk cId="3988782437" sldId="286"/>
+            <ac:spMk id="13" creationId="{8A62971C-C376-78B9-9FA5-84DBF3C27070}"/>
+          </ac:spMkLst>
+        </pc:spChg>
+        <pc:graphicFrameChg chg="add mod">
+          <ac:chgData name="Sutar, Monal Gajanan (Cognizant)" userId="cbef091d-1278-48f6-97ae-0b476c410a24" providerId="ADAL" clId="{69AB6919-4147-41D2-8237-888729AF7CC5}" dt="2026-05-28T06:14:38.659" v="245"/>
+          <ac:graphicFrameMkLst>
+            <pc:docMk/>
+            <pc:sldMk cId="3988782437" sldId="286"/>
+            <ac:graphicFrameMk id="14" creationId="{66BB463A-3AD6-AB10-4C4E-F054330D1380}"/>
+          </ac:graphicFrameMkLst>
+        </pc:graphicFrameChg>
+        <pc:picChg chg="add mod">
+          <ac:chgData name="Sutar, Monal Gajanan (Cognizant)" userId="cbef091d-1278-48f6-97ae-0b476c410a24" providerId="ADAL" clId="{69AB6919-4147-41D2-8237-888729AF7CC5}" dt="2026-05-28T06:21:32.652" v="291" actId="1076"/>
+          <ac:picMkLst>
+            <pc:docMk/>
+            <pc:sldMk cId="3988782437" sldId="286"/>
+            <ac:picMk id="1026" creationId="{885959AB-7087-D7CF-FAF7-CDFC2ED5BDB4}"/>
+          </ac:picMkLst>
+        </pc:picChg>
+        <pc:picChg chg="add del mod">
+          <ac:chgData name="Sutar, Monal Gajanan (Cognizant)" userId="cbef091d-1278-48f6-97ae-0b476c410a24" providerId="ADAL" clId="{69AB6919-4147-41D2-8237-888729AF7CC5}" dt="2026-05-28T06:20:36.369" v="270" actId="478"/>
+          <ac:picMkLst>
+            <pc:docMk/>
+            <pc:sldMk cId="3988782437" sldId="286"/>
+            <ac:picMk id="1028" creationId="{3020490A-F089-71C6-7453-A43967D3216D}"/>
+          </ac:picMkLst>
+        </pc:picChg>
+        <pc:picChg chg="add mod">
+          <ac:chgData name="Sutar, Monal Gajanan (Cognizant)" userId="cbef091d-1278-48f6-97ae-0b476c410a24" providerId="ADAL" clId="{69AB6919-4147-41D2-8237-888729AF7CC5}" dt="2026-05-28T06:34:33.421" v="360" actId="1076"/>
+          <ac:picMkLst>
+            <pc:docMk/>
+            <pc:sldMk cId="3988782437" sldId="286"/>
+            <ac:picMk id="1030" creationId="{70D91DC5-EC98-3099-00E6-3BFFE95261AF}"/>
+          </ac:picMkLst>
+        </pc:picChg>
+      </pc:sldChg>
+      <pc:sldChg chg="addSp delSp modSp new mod">
+        <pc:chgData name="Sutar, Monal Gajanan (Cognizant)" userId="cbef091d-1278-48f6-97ae-0b476c410a24" providerId="ADAL" clId="{69AB6919-4147-41D2-8237-888729AF7CC5}" dt="2026-05-28T09:21:33.026" v="444" actId="478"/>
+        <pc:sldMkLst>
+          <pc:docMk/>
+          <pc:sldMk cId="2041285797" sldId="287"/>
+        </pc:sldMkLst>
+        <pc:spChg chg="mod">
+          <ac:chgData name="Sutar, Monal Gajanan (Cognizant)" userId="cbef091d-1278-48f6-97ae-0b476c410a24" providerId="ADAL" clId="{69AB6919-4147-41D2-8237-888729AF7CC5}" dt="2026-05-28T06:07:22.728" v="223" actId="14100"/>
+          <ac:spMkLst>
+            <pc:docMk/>
+            <pc:sldMk cId="2041285797" sldId="287"/>
+            <ac:spMk id="2" creationId="{38CF5133-B495-8CCC-36DB-63DB6F6E1053}"/>
+          </ac:spMkLst>
+        </pc:spChg>
+        <pc:spChg chg="add del mod">
+          <ac:chgData name="Sutar, Monal Gajanan (Cognizant)" userId="cbef091d-1278-48f6-97ae-0b476c410a24" providerId="ADAL" clId="{69AB6919-4147-41D2-8237-888729AF7CC5}" dt="2026-05-28T06:28:23.269" v="322" actId="113"/>
+          <ac:spMkLst>
+            <pc:docMk/>
+            <pc:sldMk cId="2041285797" sldId="287"/>
+            <ac:spMk id="3" creationId="{3821C2E0-6C22-FFA2-D19B-626DCCBA855F}"/>
+          </ac:spMkLst>
+        </pc:spChg>
+        <pc:spChg chg="del">
+          <ac:chgData name="Sutar, Monal Gajanan (Cognizant)" userId="cbef091d-1278-48f6-97ae-0b476c410a24" providerId="ADAL" clId="{69AB6919-4147-41D2-8237-888729AF7CC5}" dt="2026-05-28T09:21:29.927" v="443" actId="478"/>
+          <ac:spMkLst>
+            <pc:docMk/>
+            <pc:sldMk cId="2041285797" sldId="287"/>
+            <ac:spMk id="4" creationId="{5374C693-0AA4-0125-A9D9-7DCB10CD0714}"/>
+          </ac:spMkLst>
+        </pc:spChg>
+        <pc:spChg chg="del">
+          <ac:chgData name="Sutar, Monal Gajanan (Cognizant)" userId="cbef091d-1278-48f6-97ae-0b476c410a24" providerId="ADAL" clId="{69AB6919-4147-41D2-8237-888729AF7CC5}" dt="2026-05-28T09:21:33.026" v="444" actId="478"/>
+          <ac:spMkLst>
+            <pc:docMk/>
+            <pc:sldMk cId="2041285797" sldId="287"/>
+            <ac:spMk id="6" creationId="{CCDD38C7-DA7F-E48F-08F4-DA1D3B274C5D}"/>
+          </ac:spMkLst>
+        </pc:spChg>
+        <pc:graphicFrameChg chg="add mod">
+          <ac:chgData name="Sutar, Monal Gajanan (Cognizant)" userId="cbef091d-1278-48f6-97ae-0b476c410a24" providerId="ADAL" clId="{69AB6919-4147-41D2-8237-888729AF7CC5}" dt="2026-05-28T06:06:22.395" v="179"/>
+          <ac:graphicFrameMkLst>
+            <pc:docMk/>
+            <pc:sldMk cId="2041285797" sldId="287"/>
+            <ac:graphicFrameMk id="7" creationId="{8126FD48-BA5D-35BB-2805-04D42CCCA562}"/>
+          </ac:graphicFrameMkLst>
+        </pc:graphicFrameChg>
+      </pc:sldChg>
+    </pc:docChg>
+  </pc:docChgLst>
+</pc:chgInfo>
 </file>
 
 <file path=ppt/slideLayouts/slideLayout1.xml><?xml version="1.0" encoding="utf-8"?>
@@ -293,7 +785,7 @@
           <a:p>
             <a:fld id="{12575099-B3AD-44D7-919B-BCB6DC3E7F21}" type="datetimeFigureOut">
               <a:rPr lang="en-US" dirty="0"/>
-              <a:t>5/25/2026</a:t>
+              <a:t>5/28/2026</a:t>
             </a:fld>
             <a:endParaRPr lang="en-US"/>
           </a:p>
@@ -495,7 +987,7 @@
           <a:p>
             <a:fld id="{F18115DA-6CBC-4AEF-A85F-371C66916CF8}" type="datetimeFigureOut">
               <a:rPr lang="en-US" dirty="0"/>
-              <a:t>5/25/2026</a:t>
+              <a:t>5/28/2026</a:t>
             </a:fld>
             <a:endParaRPr lang="en-US"/>
           </a:p>
@@ -707,7 +1199,7 @@
           <a:p>
             <a:fld id="{2A6007E4-95E8-4ABC-B20B-51235318A487}" type="datetimeFigureOut">
               <a:rPr lang="en-US" dirty="0"/>
-              <a:t>5/25/2026</a:t>
+              <a:t>5/28/2026</a:t>
             </a:fld>
             <a:endParaRPr lang="en-US"/>
           </a:p>
@@ -909,7 +1401,7 @@
           <a:p>
             <a:fld id="{2A4BF121-2723-4D35-ADA9-215CD054C4BC}" type="datetimeFigureOut">
               <a:rPr lang="en-US" dirty="0"/>
-              <a:t>5/25/2026</a:t>
+              <a:t>5/28/2026</a:t>
             </a:fld>
             <a:endParaRPr lang="en-US"/>
           </a:p>
@@ -1188,7 +1680,7 @@
           <a:p>
             <a:fld id="{C54F54BA-4BC6-480F-839C-951A49B248A9}" type="datetimeFigureOut">
               <a:rPr lang="en-US" dirty="0"/>
-              <a:t>5/25/2026</a:t>
+              <a:t>5/28/2026</a:t>
             </a:fld>
             <a:endParaRPr lang="en-US"/>
           </a:p>
@@ -1462,7 +1954,7 @@
           <a:p>
             <a:fld id="{0F9DD0EA-4726-4440-BF9D-E88296FC3068}" type="datetimeFigureOut">
               <a:rPr lang="en-US" dirty="0"/>
-              <a:t>5/25/2026</a:t>
+              <a:t>5/28/2026</a:t>
             </a:fld>
             <a:endParaRPr lang="en-US"/>
           </a:p>
@@ -1886,7 +2378,7 @@
           <a:p>
             <a:fld id="{19CAD10D-99D1-46B2-A85A-C16850FCF8CF}" type="datetimeFigureOut">
               <a:rPr lang="en-US" dirty="0"/>
-              <a:t>5/25/2026</a:t>
+              <a:t>5/28/2026</a:t>
             </a:fld>
             <a:endParaRPr lang="en-US"/>
           </a:p>
@@ -2031,7 +2523,7 @@
           <a:p>
             <a:fld id="{48C67E51-34D6-4E3D-8F41-CC63EA446EDD}" type="datetimeFigureOut">
               <a:rPr lang="en-US" dirty="0"/>
-              <a:t>5/25/2026</a:t>
+              <a:t>5/28/2026</a:t>
             </a:fld>
             <a:endParaRPr lang="en-US"/>
           </a:p>
@@ -2148,7 +2640,7 @@
           <a:p>
             <a:fld id="{8D49E550-CE3F-497F-B953-7DE0932F91C0}" type="datetimeFigureOut">
               <a:rPr lang="en-US" dirty="0"/>
-              <a:t>5/25/2026</a:t>
+              <a:t>5/28/2026</a:t>
             </a:fld>
             <a:endParaRPr lang="en-US"/>
           </a:p>
@@ -2463,7 +2955,7 @@
           <a:p>
             <a:fld id="{217A0BF4-BAA0-4539-95F2-9C4277F97478}" type="datetimeFigureOut">
               <a:rPr lang="en-US" dirty="0"/>
-              <a:t>5/25/2026</a:t>
+              <a:t>5/28/2026</a:t>
             </a:fld>
             <a:endParaRPr lang="en-US"/>
           </a:p>
@@ -2755,7 +3247,7 @@
           <a:p>
             <a:fld id="{52E9884E-D945-496C-84BE-49C61F78F9EC}" type="datetimeFigureOut">
               <a:rPr lang="en-US" dirty="0"/>
-              <a:t>5/25/2026</a:t>
+              <a:t>5/28/2026</a:t>
             </a:fld>
             <a:endParaRPr lang="en-US"/>
           </a:p>
@@ -2999,7 +3491,7 @@
           <a:p>
             <a:fld id="{CD438618-DEE5-47CF-A8B2-A9E090D503CD}" type="datetimeFigureOut">
               <a:rPr lang="en-US" dirty="0"/>
-              <a:t>5/25/2026</a:t>
+              <a:t>5/28/2026</a:t>
             </a:fld>
             <a:endParaRPr lang="en-US"/>
           </a:p>
@@ -3636,39 +4128,542 @@
           </a:p>
         </p:txBody>
       </p:sp>
-      <p:sp>
-        <p:nvSpPr>
-          <p:cNvPr id="6" name="Slide Number Placeholder 5">
-            <a:extLst>
-              <a:ext uri="{FF2B5EF4-FFF2-40B4-BE49-F238E27FC236}">
-                <a16:creationId xmlns:a16="http://schemas.microsoft.com/office/drawing/2014/main" id="{919EC831-6615-BF8B-497E-3A525786226F}"/>
-              </a:ext>
-            </a:extLst>
-          </p:cNvPr>
-          <p:cNvSpPr>
-            <a:spLocks noGrp="1"/>
-          </p:cNvSpPr>
-          <p:nvPr>
-            <p:ph type="sldNum" sz="quarter" idx="12"/>
-          </p:nvPr>
-        </p:nvSpPr>
-        <p:spPr/>
-        <p:txBody>
-          <a:bodyPr/>
-          <a:lstStyle/>
-          <a:p>
-            <a:fld id="{E30AF5A0-43BB-4336-8627-9123B9144D80}" type="slidenum">
-              <a:rPr lang="en-US" dirty="0"/>
-              <a:t>1</a:t>
-            </a:fld>
-            <a:endParaRPr lang="en-US"/>
-          </a:p>
-        </p:txBody>
-      </p:sp>
     </p:spTree>
     <p:extLst>
       <p:ext uri="{BB962C8B-B14F-4D97-AF65-F5344CB8AC3E}">
         <p14:creationId xmlns:p14="http://schemas.microsoft.com/office/powerpoint/2010/main" val="1231602178"/>
+      </p:ext>
+    </p:extLst>
+  </p:cSld>
+  <p:clrMapOvr>
+    <a:masterClrMapping/>
+  </p:clrMapOvr>
+</p:sld>
+</file>
+
+<file path=ppt/slides/slide10.xml><?xml version="1.0" encoding="utf-8"?>
+<p:sld xmlns:a="http://schemas.openxmlformats.org/drawingml/2006/main" xmlns:r="http://schemas.openxmlformats.org/officeDocument/2006/relationships" xmlns:p="http://schemas.openxmlformats.org/presentationml/2006/main">
+  <p:cSld>
+    <p:spTree>
+      <p:nvGrpSpPr>
+        <p:cNvPr id="1" name=""/>
+        <p:cNvGrpSpPr/>
+        <p:nvPr/>
+      </p:nvGrpSpPr>
+      <p:grpSpPr>
+        <a:xfrm>
+          <a:off x="0" y="0"/>
+          <a:ext cx="0" cy="0"/>
+          <a:chOff x="0" y="0"/>
+          <a:chExt cx="0" cy="0"/>
+        </a:xfrm>
+      </p:grpSpPr>
+      <p:sp>
+        <p:nvSpPr>
+          <p:cNvPr id="2" name="Title 1">
+            <a:extLst>
+              <a:ext uri="{FF2B5EF4-FFF2-40B4-BE49-F238E27FC236}">
+                <a16:creationId xmlns:a16="http://schemas.microsoft.com/office/drawing/2014/main" id="{9C61CD52-7C5A-242D-5E73-B06B16DE43A1}"/>
+              </a:ext>
+            </a:extLst>
+          </p:cNvPr>
+          <p:cNvSpPr>
+            <a:spLocks noGrp="1"/>
+          </p:cNvSpPr>
+          <p:nvPr>
+            <p:ph type="title"/>
+          </p:nvPr>
+        </p:nvSpPr>
+        <p:spPr/>
+        <p:txBody>
+          <a:bodyPr>
+            <a:normAutofit/>
+          </a:bodyPr>
+          <a:lstStyle/>
+          <a:p>
+            <a:r>
+              <a:rPr lang="en-GB" dirty="0"/>
+              <a:t>ECU working principle</a:t>
+            </a:r>
+            <a:br>
+              <a:rPr lang="en-GB" b="1" dirty="0"/>
+            </a:br>
+            <a:endParaRPr lang="en-IN" dirty="0"/>
+          </a:p>
+        </p:txBody>
+      </p:sp>
+      <p:sp>
+        <p:nvSpPr>
+          <p:cNvPr id="3" name="Content Placeholder 2">
+            <a:extLst>
+              <a:ext uri="{FF2B5EF4-FFF2-40B4-BE49-F238E27FC236}">
+                <a16:creationId xmlns:a16="http://schemas.microsoft.com/office/drawing/2014/main" id="{909C5254-C8E5-D3A6-EA51-8D2ECF2B4A05}"/>
+              </a:ext>
+            </a:extLst>
+          </p:cNvPr>
+          <p:cNvSpPr>
+            <a:spLocks noGrp="1"/>
+          </p:cNvSpPr>
+          <p:nvPr>
+            <p:ph idx="1"/>
+          </p:nvPr>
+        </p:nvSpPr>
+        <p:spPr>
+          <a:xfrm>
+            <a:off x="525477" y="1912126"/>
+            <a:ext cx="8018449" cy="3636088"/>
+          </a:xfrm>
+        </p:spPr>
+        <p:txBody>
+          <a:bodyPr>
+            <a:normAutofit/>
+          </a:bodyPr>
+          <a:lstStyle/>
+          <a:p>
+            <a:pPr fontAlgn="base"/>
+            <a:r>
+              <a:rPr lang="en-GB" dirty="0"/>
+              <a:t>An ECU has an application software which is a set of algorithms.</a:t>
+            </a:r>
+          </a:p>
+          <a:p>
+            <a:r>
+              <a:rPr lang="en-GB" dirty="0"/>
+              <a:t>ECU receives inputs from sensors and other ECUs (speed, temperature, etc.)</a:t>
+            </a:r>
+          </a:p>
+          <a:p>
+            <a:r>
+              <a:rPr lang="en-GB" dirty="0"/>
+              <a:t>It checks the data to ensure it is correct</a:t>
+            </a:r>
+          </a:p>
+          <a:p>
+            <a:r>
+              <a:rPr lang="en-GB" dirty="0"/>
+              <a:t>ECU uses application software (algorithms) to process the inputs</a:t>
+            </a:r>
+          </a:p>
+          <a:p>
+            <a:r>
+              <a:rPr lang="en-GB" dirty="0"/>
+              <a:t>Based on logic, it calculates the required output</a:t>
+            </a:r>
+          </a:p>
+          <a:p>
+            <a:r>
+              <a:rPr lang="en-GB" dirty="0"/>
+              <a:t>Sends commands to actuators to perform actions</a:t>
+            </a:r>
+          </a:p>
+          <a:p>
+            <a:r>
+              <a:rPr lang="en-GB" dirty="0"/>
+              <a:t>This process runs continuously in real-time</a:t>
+            </a:r>
+          </a:p>
+          <a:p>
+            <a:endParaRPr lang="en-IN" dirty="0"/>
+          </a:p>
+        </p:txBody>
+      </p:sp>
+      <p:sp>
+        <p:nvSpPr>
+          <p:cNvPr id="5" name="Footer Placeholder 4">
+            <a:extLst>
+              <a:ext uri="{FF2B5EF4-FFF2-40B4-BE49-F238E27FC236}">
+                <a16:creationId xmlns:a16="http://schemas.microsoft.com/office/drawing/2014/main" id="{DE90B05A-62A5-080E-8A0D-C73F6C06033B}"/>
+              </a:ext>
+            </a:extLst>
+          </p:cNvPr>
+          <p:cNvSpPr>
+            <a:spLocks noGrp="1"/>
+          </p:cNvSpPr>
+          <p:nvPr>
+            <p:ph type="ftr" sz="quarter" idx="11"/>
+          </p:nvPr>
+        </p:nvSpPr>
+        <p:spPr/>
+        <p:txBody>
+          <a:bodyPr/>
+          <a:lstStyle/>
+          <a:p>
+            <a:r>
+              <a:rPr lang="en-US"/>
+              <a:t>
+              </a:t>
+            </a:r>
+          </a:p>
+        </p:txBody>
+      </p:sp>
+    </p:spTree>
+    <p:extLst>
+      <p:ext uri="{BB962C8B-B14F-4D97-AF65-F5344CB8AC3E}">
+        <p14:creationId xmlns:p14="http://schemas.microsoft.com/office/powerpoint/2010/main" val="3939511972"/>
+      </p:ext>
+    </p:extLst>
+  </p:cSld>
+  <p:clrMapOvr>
+    <a:masterClrMapping/>
+  </p:clrMapOvr>
+</p:sld>
+</file>
+
+<file path=ppt/slides/slide11.xml><?xml version="1.0" encoding="utf-8"?>
+<p:sld xmlns:a="http://schemas.openxmlformats.org/drawingml/2006/main" xmlns:r="http://schemas.openxmlformats.org/officeDocument/2006/relationships" xmlns:p="http://schemas.openxmlformats.org/presentationml/2006/main">
+  <p:cSld>
+    <p:spTree>
+      <p:nvGrpSpPr>
+        <p:cNvPr id="1" name=""/>
+        <p:cNvGrpSpPr/>
+        <p:nvPr/>
+      </p:nvGrpSpPr>
+      <p:grpSpPr>
+        <a:xfrm>
+          <a:off x="0" y="0"/>
+          <a:ext cx="0" cy="0"/>
+          <a:chOff x="0" y="0"/>
+          <a:chExt cx="0" cy="0"/>
+        </a:xfrm>
+      </p:grpSpPr>
+      <p:sp>
+        <p:nvSpPr>
+          <p:cNvPr id="2" name="Title 1">
+            <a:extLst>
+              <a:ext uri="{FF2B5EF4-FFF2-40B4-BE49-F238E27FC236}">
+                <a16:creationId xmlns:a16="http://schemas.microsoft.com/office/drawing/2014/main" id="{38CF5133-B495-8CCC-36DB-63DB6F6E1053}"/>
+              </a:ext>
+            </a:extLst>
+          </p:cNvPr>
+          <p:cNvSpPr>
+            <a:spLocks noGrp="1"/>
+          </p:cNvSpPr>
+          <p:nvPr>
+            <p:ph type="title"/>
+          </p:nvPr>
+        </p:nvSpPr>
+        <p:spPr>
+          <a:xfrm>
+            <a:off x="525477" y="922096"/>
+            <a:ext cx="8018449" cy="808733"/>
+          </a:xfrm>
+        </p:spPr>
+        <p:txBody>
+          <a:bodyPr/>
+          <a:lstStyle/>
+          <a:p>
+            <a:r>
+              <a:rPr lang="en-IN" dirty="0"/>
+              <a:t>MOST Protocol in ECU</a:t>
+            </a:r>
+          </a:p>
+        </p:txBody>
+      </p:sp>
+      <p:sp>
+        <p:nvSpPr>
+          <p:cNvPr id="3" name="Content Placeholder 2">
+            <a:extLst>
+              <a:ext uri="{FF2B5EF4-FFF2-40B4-BE49-F238E27FC236}">
+                <a16:creationId xmlns:a16="http://schemas.microsoft.com/office/drawing/2014/main" id="{3821C2E0-6C22-FFA2-D19B-626DCCBA855F}"/>
+              </a:ext>
+            </a:extLst>
+          </p:cNvPr>
+          <p:cNvSpPr>
+            <a:spLocks noGrp="1"/>
+          </p:cNvSpPr>
+          <p:nvPr>
+            <p:ph idx="1"/>
+          </p:nvPr>
+        </p:nvSpPr>
+        <p:spPr>
+          <a:xfrm>
+            <a:off x="525477" y="1928001"/>
+            <a:ext cx="8018449" cy="3636088"/>
+          </a:xfrm>
+        </p:spPr>
+        <p:txBody>
+          <a:bodyPr>
+            <a:normAutofit fontScale="92500" lnSpcReduction="20000"/>
+          </a:bodyPr>
+          <a:lstStyle/>
+          <a:p>
+            <a:r>
+              <a:rPr lang="en-GB" dirty="0"/>
+              <a:t>In an automotive system, each ECU (Electronic Control Unit) acts as both a sender and receiver</a:t>
+            </a:r>
+          </a:p>
+          <a:p>
+            <a:r>
+              <a:rPr lang="en-GB" dirty="0"/>
+              <a:t>An ECU broadcasts messages (e.g., sensor data) to all ECUs on the network</a:t>
+            </a:r>
+          </a:p>
+          <a:p>
+            <a:r>
+              <a:rPr lang="en-GB" dirty="0"/>
+              <a:t>Every ECU reads all incoming messages and determines if the data is relevant</a:t>
+            </a:r>
+          </a:p>
+          <a:p>
+            <a:r>
+              <a:rPr lang="en-GB" dirty="0"/>
+              <a:t>Relevant ECUs process the message, while others ignore it</a:t>
+            </a:r>
+          </a:p>
+          <a:p>
+            <a:r>
+              <a:rPr lang="en-GB" dirty="0"/>
+              <a:t>Each ECU performs error checking to ensure reliable communication</a:t>
+            </a:r>
+          </a:p>
+          <a:p>
+            <a:r>
+              <a:rPr lang="en-GB" dirty="0"/>
+              <a:t>ECUs send acknowledgements confirming successful reception</a:t>
+            </a:r>
+          </a:p>
+          <a:p>
+            <a:r>
+              <a:rPr lang="en-GB" dirty="0"/>
+              <a:t>Supports real-time, synchronized data sharing between multiple ECUs</a:t>
+            </a:r>
+          </a:p>
+        </p:txBody>
+      </p:sp>
+      <p:sp>
+        <p:nvSpPr>
+          <p:cNvPr id="5" name="Footer Placeholder 4">
+            <a:extLst>
+              <a:ext uri="{FF2B5EF4-FFF2-40B4-BE49-F238E27FC236}">
+                <a16:creationId xmlns:a16="http://schemas.microsoft.com/office/drawing/2014/main" id="{EF21FB92-9E4A-426B-A0BA-B9BF3BACD22D}"/>
+              </a:ext>
+            </a:extLst>
+          </p:cNvPr>
+          <p:cNvSpPr>
+            <a:spLocks noGrp="1"/>
+          </p:cNvSpPr>
+          <p:nvPr>
+            <p:ph type="ftr" sz="quarter" idx="11"/>
+          </p:nvPr>
+        </p:nvSpPr>
+        <p:spPr/>
+        <p:txBody>
+          <a:bodyPr/>
+          <a:lstStyle/>
+          <a:p>
+            <a:r>
+              <a:rPr lang="en-US"/>
+              <a:t>
+              </a:t>
+            </a:r>
+          </a:p>
+        </p:txBody>
+      </p:sp>
+    </p:spTree>
+    <p:extLst>
+      <p:ext uri="{BB962C8B-B14F-4D97-AF65-F5344CB8AC3E}">
+        <p14:creationId xmlns:p14="http://schemas.microsoft.com/office/powerpoint/2010/main" val="2041285797"/>
+      </p:ext>
+    </p:extLst>
+  </p:cSld>
+  <p:clrMapOvr>
+    <a:masterClrMapping/>
+  </p:clrMapOvr>
+</p:sld>
+</file>
+
+<file path=ppt/slides/slide12.xml><?xml version="1.0" encoding="utf-8"?>
+<p:sld xmlns:a="http://schemas.openxmlformats.org/drawingml/2006/main" xmlns:r="http://schemas.openxmlformats.org/officeDocument/2006/relationships" xmlns:p="http://schemas.openxmlformats.org/presentationml/2006/main">
+  <p:cSld>
+    <p:spTree>
+      <p:nvGrpSpPr>
+        <p:cNvPr id="1" name=""/>
+        <p:cNvGrpSpPr/>
+        <p:nvPr/>
+      </p:nvGrpSpPr>
+      <p:grpSpPr>
+        <a:xfrm>
+          <a:off x="0" y="0"/>
+          <a:ext cx="0" cy="0"/>
+          <a:chOff x="0" y="0"/>
+          <a:chExt cx="0" cy="0"/>
+        </a:xfrm>
+      </p:grpSpPr>
+      <p:sp>
+        <p:nvSpPr>
+          <p:cNvPr id="4" name="Date Placeholder 3">
+            <a:extLst>
+              <a:ext uri="{FF2B5EF4-FFF2-40B4-BE49-F238E27FC236}">
+                <a16:creationId xmlns:a16="http://schemas.microsoft.com/office/drawing/2014/main" id="{163484DC-31FE-13E9-2CE3-D233F59688C2}"/>
+              </a:ext>
+            </a:extLst>
+          </p:cNvPr>
+          <p:cNvSpPr>
+            <a:spLocks noGrp="1"/>
+          </p:cNvSpPr>
+          <p:nvPr>
+            <p:ph type="dt" sz="half" idx="10"/>
+          </p:nvPr>
+        </p:nvSpPr>
+        <p:spPr/>
+        <p:txBody>
+          <a:bodyPr/>
+          <a:lstStyle/>
+          <a:p>
+            <a:fld id="{88567D16-BFC2-4788-A8D6-4B3BC114365C}" type="datetime1">
+              <a:rPr lang="en-US"/>
+              <a:t>5/28/2026</a:t>
+            </a:fld>
+            <a:endParaRPr lang="en-US"/>
+          </a:p>
+        </p:txBody>
+      </p:sp>
+      <p:sp>
+        <p:nvSpPr>
+          <p:cNvPr id="5" name="Footer Placeholder 4">
+            <a:extLst>
+              <a:ext uri="{FF2B5EF4-FFF2-40B4-BE49-F238E27FC236}">
+                <a16:creationId xmlns:a16="http://schemas.microsoft.com/office/drawing/2014/main" id="{B074B7E1-CCE3-7E0C-085E-EC35B21B4BEB}"/>
+              </a:ext>
+            </a:extLst>
+          </p:cNvPr>
+          <p:cNvSpPr>
+            <a:spLocks noGrp="1"/>
+          </p:cNvSpPr>
+          <p:nvPr>
+            <p:ph type="ftr" sz="quarter" idx="11"/>
+          </p:nvPr>
+        </p:nvSpPr>
+        <p:spPr/>
+        <p:txBody>
+          <a:bodyPr/>
+          <a:lstStyle/>
+          <a:p>
+            <a:r>
+              <a:rPr lang="en-US"/>
+              <a:t>
+              </a:t>
+            </a:r>
+          </a:p>
+        </p:txBody>
+      </p:sp>
+      <p:sp>
+        <p:nvSpPr>
+          <p:cNvPr id="6" name="Slide Number Placeholder 5">
+            <a:extLst>
+              <a:ext uri="{FF2B5EF4-FFF2-40B4-BE49-F238E27FC236}">
+                <a16:creationId xmlns:a16="http://schemas.microsoft.com/office/drawing/2014/main" id="{61939984-5E46-934B-015B-624934A1E484}"/>
+              </a:ext>
+            </a:extLst>
+          </p:cNvPr>
+          <p:cNvSpPr>
+            <a:spLocks noGrp="1"/>
+          </p:cNvSpPr>
+          <p:nvPr>
+            <p:ph type="sldNum" sz="quarter" idx="12"/>
+          </p:nvPr>
+        </p:nvSpPr>
+        <p:spPr/>
+        <p:txBody>
+          <a:bodyPr/>
+          <a:lstStyle/>
+          <a:p>
+            <a:fld id="{E30AF5A0-43BB-4336-8627-9123B9144D80}" type="slidenum">
+              <a:rPr lang="en-US" dirty="0"/>
+              <a:t>12</a:t>
+            </a:fld>
+            <a:endParaRPr lang="en-US"/>
+          </a:p>
+        </p:txBody>
+      </p:sp>
+      <p:sp>
+        <p:nvSpPr>
+          <p:cNvPr id="7" name="Title 3">
+            <a:extLst>
+              <a:ext uri="{FF2B5EF4-FFF2-40B4-BE49-F238E27FC236}">
+                <a16:creationId xmlns:a16="http://schemas.microsoft.com/office/drawing/2014/main" id="{A68B173E-FF15-6269-36AE-1D2809EA743A}"/>
+              </a:ext>
+            </a:extLst>
+          </p:cNvPr>
+          <p:cNvSpPr>
+            <a:spLocks noGrp="1"/>
+          </p:cNvSpPr>
+          <p:nvPr/>
+        </p:nvSpPr>
+        <p:spPr>
+          <a:xfrm>
+            <a:off x="313100" y="979107"/>
+            <a:ext cx="9029770" cy="737394"/>
+          </a:xfrm>
+          <a:prstGeom prst="rect">
+            <a:avLst/>
+          </a:prstGeom>
+        </p:spPr>
+        <p:txBody>
+          <a:bodyPr vert="horz" lIns="91440" tIns="45720" rIns="91440" bIns="45720" rtlCol="0" anchor="ctr">
+            <a:noAutofit/>
+          </a:bodyPr>
+          <a:lstStyle>
+            <a:lvl1pPr algn="l" defTabSz="914400" rtl="0" eaLnBrk="1" latinLnBrk="0" hangingPunct="1">
+              <a:lnSpc>
+                <a:spcPct val="90000"/>
+              </a:lnSpc>
+              <a:spcBef>
+                <a:spcPct val="0"/>
+              </a:spcBef>
+              <a:buNone/>
+              <a:defRPr sz="4400" kern="1200">
+                <a:solidFill>
+                  <a:schemeClr val="tx1"/>
+                </a:solidFill>
+                <a:latin typeface="+mj-lt"/>
+                <a:ea typeface="+mj-ea"/>
+                <a:cs typeface="+mj-cs"/>
+              </a:defRPr>
+            </a:lvl1pPr>
+          </a:lstStyle>
+          <a:p>
+            <a:r>
+              <a:rPr lang="en-US" sz="2800" cap="all" spc="30"/>
+              <a:t>CAN BUS Network Diagram and ECU interaction</a:t>
+            </a:r>
+          </a:p>
+        </p:txBody>
+      </p:sp>
+      <p:pic>
+        <p:nvPicPr>
+          <p:cNvPr id="2" name="Picture 1" descr="A diagram of a network&#10;&#10;AI-generated content may be incorrect.">
+            <a:extLst>
+              <a:ext uri="{FF2B5EF4-FFF2-40B4-BE49-F238E27FC236}">
+                <a16:creationId xmlns:a16="http://schemas.microsoft.com/office/drawing/2014/main" id="{2E6D4ABE-057C-9EA5-227C-98D101B5050C}"/>
+              </a:ext>
+            </a:extLst>
+          </p:cNvPr>
+          <p:cNvPicPr>
+            <a:picLocks noChangeAspect="1"/>
+          </p:cNvPicPr>
+          <p:nvPr/>
+        </p:nvPicPr>
+        <p:blipFill>
+          <a:blip r:embed="rId2"/>
+          <a:stretch>
+            <a:fillRect/>
+          </a:stretch>
+        </p:blipFill>
+        <p:spPr>
+          <a:xfrm>
+            <a:off x="150019" y="1714500"/>
+            <a:ext cx="8843962" cy="4976812"/>
+          </a:xfrm>
+          <a:prstGeom prst="rect">
+            <a:avLst/>
+          </a:prstGeom>
+        </p:spPr>
+      </p:pic>
+    </p:spTree>
+    <p:extLst>
+      <p:ext uri="{BB962C8B-B14F-4D97-AF65-F5344CB8AC3E}">
+        <p14:creationId xmlns:p14="http://schemas.microsoft.com/office/powerpoint/2010/main" val="334398325"/>
       </p:ext>
     </p:extLst>
   </p:cSld>
@@ -3739,35 +4734,35 @@
           <a:lstStyle/>
           <a:p>
             <a:r>
-              <a:rPr lang="en-US"/>
+              <a:rPr lang="en-US" dirty="0"/>
               <a:t>Global industry with many companies involved in vehicle design, manufacturing, and services</a:t>
             </a:r>
-            <a:endParaRPr/>
-          </a:p>
-          <a:p>
-            <a:r>
-              <a:rPr lang="en-US"/>
+            <a:endParaRPr dirty="0"/>
+          </a:p>
+          <a:p>
+            <a:r>
+              <a:rPr lang="en-US" dirty="0"/>
               <a:t>OEMs (Original Equipment Manufacturers)</a:t>
             </a:r>
             <a:br>
-              <a:rPr lang="en-US"/>
+              <a:rPr lang="en-US" dirty="0"/>
             </a:br>
             <a:r>
-              <a:rPr lang="en-US"/>
+              <a:rPr lang="en-US" dirty="0"/>
               <a:t> → Companies that manufacture vehicles (cars, trucks, EVs)</a:t>
             </a:r>
-            <a:endParaRPr/>
-          </a:p>
-          <a:p>
-            <a:r>
-              <a:rPr lang="en-US"/>
+            <a:endParaRPr dirty="0"/>
+          </a:p>
+          <a:p>
+            <a:r>
+              <a:rPr lang="en-US" dirty="0"/>
               <a:t>Suppliers</a:t>
             </a:r>
             <a:br>
-              <a:rPr lang="en-US"/>
+              <a:rPr lang="en-US" dirty="0"/>
             </a:br>
             <a:r>
-              <a:rPr lang="en-US"/>
+              <a:rPr lang="en-US" dirty="0"/>
               <a:t> → Provide components like engines, sensors, ECUs, electronics</a:t>
             </a:r>
           </a:p>
@@ -3776,33 +4771,33 @@
               <a:buNone/>
             </a:pPr>
             <a:r>
-              <a:rPr lang="en-US" b="1"/>
+              <a:rPr lang="en-US" b="1" dirty="0"/>
               <a:t>Industry Growth &amp; Changes</a:t>
             </a:r>
           </a:p>
           <a:p>
             <a:r>
-              <a:rPr lang="en-US"/>
+              <a:rPr lang="en-US" dirty="0"/>
               <a:t>Shift from mechanical to electronic to software-based vehicles</a:t>
             </a:r>
-            <a:endParaRPr lang="en-GB"/>
-          </a:p>
-          <a:p>
-            <a:r>
-              <a:rPr lang="en-US"/>
+            <a:endParaRPr lang="en-GB" dirty="0"/>
+          </a:p>
+          <a:p>
+            <a:r>
+              <a:rPr lang="en-US" dirty="0"/>
               <a:t>Increasing use of ECUs and embedded systems</a:t>
             </a:r>
-            <a:endParaRPr lang="en-GB"/>
+            <a:endParaRPr lang="en-GB" dirty="0"/>
           </a:p>
           <a:p>
             <a:pPr marL="0" indent="0">
               <a:buNone/>
             </a:pPr>
             <a:r>
-              <a:rPr lang="en-US"/>
+              <a:rPr lang="en-US" dirty="0"/>
               <a:t>Growth of: </a:t>
             </a:r>
-            <a:endParaRPr lang="en-GB"/>
+            <a:endParaRPr lang="en-GB" dirty="0"/>
           </a:p>
           <a:p>
             <a:pPr marL="228600" lvl="1">
@@ -3811,10 +4806,10 @@
               </a:spcBef>
             </a:pPr>
             <a:r>
-              <a:rPr lang="en-US" sz="2000"/>
+              <a:rPr lang="en-US" sz="2000" dirty="0"/>
               <a:t>Electric Vehicles (EVs)</a:t>
             </a:r>
-            <a:endParaRPr lang="en-GB" sz="2000"/>
+            <a:endParaRPr lang="en-GB" sz="2000" dirty="0"/>
           </a:p>
           <a:p>
             <a:pPr marL="228600" lvl="1">
@@ -3823,10 +4818,10 @@
               </a:spcBef>
             </a:pPr>
             <a:r>
-              <a:rPr lang="en-US" sz="2000"/>
+              <a:rPr lang="en-US" sz="2000" dirty="0"/>
               <a:t>ADAS (driver assistance systems)</a:t>
             </a:r>
-            <a:endParaRPr lang="en-GB" sz="2000"/>
+            <a:endParaRPr lang="en-GB" sz="2000" dirty="0"/>
           </a:p>
           <a:p>
             <a:pPr marL="228600" lvl="1">
@@ -3835,10 +4830,10 @@
               </a:spcBef>
             </a:pPr>
             <a:r>
-              <a:rPr lang="en-US" sz="2000"/>
+              <a:rPr lang="en-US" sz="2000" dirty="0"/>
               <a:t>Connected and smart cars</a:t>
             </a:r>
-            <a:endParaRPr lang="en-GB" sz="2000"/>
+            <a:endParaRPr lang="en-GB" sz="2000" dirty="0"/>
           </a:p>
         </p:txBody>
       </p:sp>
@@ -3890,55 +4885,8 @@
           <a:lstStyle/>
           <a:p>
             <a:r>
+              <a:rPr dirty="0"/>
               <a:t>Key Systems in a Vehicle</a:t>
-            </a:r>
-          </a:p>
-        </p:txBody>
-      </p:sp>
-      <p:sp>
-        <p:nvSpPr>
-          <p:cNvPr id="3" name="Content Placeholder 2"/>
-          <p:cNvSpPr>
-            <a:spLocks noGrp="1"/>
-          </p:cNvSpPr>
-          <p:nvPr>
-            <p:ph sz="half" idx="1"/>
-          </p:nvPr>
-        </p:nvSpPr>
-        <p:spPr>
-          <a:xfrm>
-            <a:off x="536538" y="2128684"/>
-            <a:ext cx="3978313" cy="3844414"/>
-          </a:xfrm>
-        </p:spPr>
-        <p:txBody>
-          <a:bodyPr>
-            <a:normAutofit/>
-          </a:bodyPr>
-          <a:lstStyle/>
-          <a:p>
-            <a:r>
-              <a:t>Engine – power generation</a:t>
-            </a:r>
-          </a:p>
-          <a:p>
-            <a:r>
-              <a:t>Brakes – safety</a:t>
-            </a:r>
-          </a:p>
-          <a:p>
-            <a:r>
-              <a:t>Transmission – speed control</a:t>
-            </a:r>
-          </a:p>
-          <a:p>
-            <a:r>
-              <a:t>Electrical – supports all systems</a:t>
-            </a:r>
-          </a:p>
-          <a:p>
-            <a:r>
-              <a:t>Infotainment – user experience</a:t>
             </a:r>
           </a:p>
         </p:txBody>
@@ -3958,7 +4906,9 @@
           <p:nvPr/>
         </p:nvPicPr>
         <p:blipFill>
-          <a:blip r:embed="rId2"/>
+          <a:blip r:embed="rId2">
+            <a:alphaModFix amt="35000"/>
+          </a:blip>
           <a:srcRect l="1323" t="1381" r="1656" b="1972"/>
           <a:stretch>
             <a:fillRect/>
@@ -3966,8 +4916,8 @@
         </p:blipFill>
         <p:spPr>
           <a:xfrm>
-            <a:off x="4283869" y="2946904"/>
-            <a:ext cx="4545806" cy="3029506"/>
+            <a:off x="2526885" y="2326800"/>
+            <a:ext cx="6320320" cy="4212113"/>
           </a:xfrm>
           <a:prstGeom prst="rect">
             <a:avLst/>
@@ -3975,6 +4925,116 @@
           <a:noFill/>
         </p:spPr>
       </p:pic>
+      <p:sp>
+        <p:nvSpPr>
+          <p:cNvPr id="3" name="Content Placeholder 2"/>
+          <p:cNvSpPr>
+            <a:spLocks noGrp="1"/>
+          </p:cNvSpPr>
+          <p:nvPr>
+            <p:ph sz="half" idx="1"/>
+          </p:nvPr>
+        </p:nvSpPr>
+        <p:spPr>
+          <a:xfrm>
+            <a:off x="536538" y="1692995"/>
+            <a:ext cx="8475811" cy="4145843"/>
+          </a:xfrm>
+        </p:spPr>
+        <p:txBody>
+          <a:bodyPr>
+            <a:normAutofit/>
+          </a:bodyPr>
+          <a:lstStyle/>
+          <a:p>
+            <a:r>
+              <a:rPr lang="en-GB" sz="1600" dirty="0"/>
+              <a:t>A vehicle is made up of </a:t>
+            </a:r>
+            <a:r>
+              <a:rPr lang="en-GB" sz="1600" b="1" dirty="0"/>
+              <a:t>different systems working together. </a:t>
+            </a:r>
+            <a:r>
+              <a:rPr lang="en-GB" sz="1600" dirty="0"/>
+              <a:t>Each system has a </a:t>
+            </a:r>
+            <a:r>
+              <a:rPr lang="en-GB" sz="1600" b="1" dirty="0"/>
+              <a:t>specific role</a:t>
+            </a:r>
+            <a:r>
+              <a:rPr lang="en-GB" sz="1600" dirty="0"/>
+              <a:t>, but all are connected</a:t>
+            </a:r>
+          </a:p>
+          <a:p>
+            <a:r>
+              <a:rPr lang="en-GB" sz="1600" b="1" dirty="0"/>
+              <a:t>Engine – Power Generation</a:t>
+            </a:r>
+            <a:br>
+              <a:rPr lang="en-GB" sz="1600" dirty="0"/>
+            </a:br>
+            <a:r>
+              <a:rPr lang="en-GB" sz="1600" dirty="0"/>
+              <a:t>Produces power to move the vehicle by converting fuel into energy</a:t>
+            </a:r>
+          </a:p>
+          <a:p>
+            <a:r>
+              <a:rPr lang="en-GB" sz="1600" b="1" dirty="0"/>
+              <a:t>Brakes – Safety System</a:t>
+            </a:r>
+            <a:br>
+              <a:rPr lang="en-GB" sz="1600" dirty="0"/>
+            </a:br>
+            <a:r>
+              <a:rPr lang="en-GB" sz="1600" dirty="0"/>
+              <a:t>Slows down or stops the vehicle to ensure safe driving</a:t>
+            </a:r>
+          </a:p>
+          <a:p>
+            <a:r>
+              <a:rPr lang="en-GB" sz="1600" b="1" dirty="0"/>
+              <a:t>Transmission – Speed Control</a:t>
+            </a:r>
+            <a:br>
+              <a:rPr lang="en-GB" sz="1600" dirty="0"/>
+            </a:br>
+            <a:r>
+              <a:rPr lang="en-GB" sz="1600" dirty="0"/>
+              <a:t>Sends power from engine to wheels and controls gear changes</a:t>
+            </a:r>
+          </a:p>
+          <a:p>
+            <a:r>
+              <a:rPr lang="en-GB" sz="1600" b="1" dirty="0"/>
+              <a:t>Electrical System – Support System</a:t>
+            </a:r>
+            <a:br>
+              <a:rPr lang="en-GB" sz="1600" dirty="0"/>
+            </a:br>
+            <a:r>
+              <a:rPr lang="en-GB" sz="1600" dirty="0"/>
+              <a:t>Provides power to all electronic parts like sensors and ECUs</a:t>
+            </a:r>
+          </a:p>
+          <a:p>
+            <a:r>
+              <a:rPr lang="en-GB" sz="1600" b="1" dirty="0"/>
+              <a:t>Infotainment – User Experience</a:t>
+            </a:r>
+            <a:br>
+              <a:rPr lang="en-GB" sz="1600" dirty="0"/>
+            </a:br>
+            <a:r>
+              <a:rPr lang="en-GB" sz="1600" dirty="0"/>
+              <a:t>Offers navigation, music, and connectivity for comfort</a:t>
+            </a:r>
+          </a:p>
+        </p:txBody>
+      </p:sp>
       <p:sp>
         <p:nvSpPr>
           <p:cNvPr id="115" name="Footer Placeholder 7">
@@ -4016,58 +5076,6 @@
               <a:t>
               </a:t>
             </a:r>
-          </a:p>
-        </p:txBody>
-      </p:sp>
-      <p:sp>
-        <p:nvSpPr>
-          <p:cNvPr id="117" name="Slide Number Placeholder 8">
-            <a:extLst>
-              <a:ext uri="{FF2B5EF4-FFF2-40B4-BE49-F238E27FC236}">
-                <a16:creationId xmlns:a16="http://schemas.microsoft.com/office/drawing/2014/main" id="{DD14DF24-B7D3-924D-E001-8489C6A1CFEB}"/>
-              </a:ext>
-            </a:extLst>
-          </p:cNvPr>
-          <p:cNvSpPr>
-            <a:spLocks noGrp="1"/>
-          </p:cNvSpPr>
-          <p:nvPr>
-            <p:ph type="sldNum" sz="quarter" idx="12"/>
-          </p:nvPr>
-        </p:nvSpPr>
-        <p:spPr>
-          <a:xfrm>
-            <a:off x="8189259" y="6356351"/>
-            <a:ext cx="504266" cy="365125"/>
-          </a:xfrm>
-        </p:spPr>
-        <p:txBody>
-          <a:bodyPr anchor="ctr">
-            <a:normAutofit/>
-          </a:bodyPr>
-          <a:lstStyle/>
-          <a:p>
-            <a:pPr>
-              <a:lnSpc>
-                <a:spcPct val="90000"/>
-              </a:lnSpc>
-              <a:spcAft>
-                <a:spcPts val="600"/>
-              </a:spcAft>
-            </a:pPr>
-            <a:fld id="{E30AF5A0-43BB-4336-8627-9123B9144D80}" type="slidenum">
-              <a:rPr lang="en-US" sz="1900" smtClean="0"/>
-              <a:pPr>
-                <a:lnSpc>
-                  <a:spcPct val="90000"/>
-                </a:lnSpc>
-                <a:spcAft>
-                  <a:spcPts val="600"/>
-                </a:spcAft>
-              </a:pPr>
-              <a:t>3</a:t>
-            </a:fld>
-            <a:endParaRPr lang="en-US" sz="1900"/>
           </a:p>
         </p:txBody>
       </p:sp>
@@ -4117,42 +5125,6 @@
           </a:p>
         </p:txBody>
       </p:sp>
-      <p:sp>
-        <p:nvSpPr>
-          <p:cNvPr id="3" name="Content Placeholder 2"/>
-          <p:cNvSpPr>
-            <a:spLocks noGrp="1"/>
-          </p:cNvSpPr>
-          <p:nvPr>
-            <p:ph idx="1"/>
-          </p:nvPr>
-        </p:nvSpPr>
-        <p:spPr/>
-        <p:txBody>
-          <a:bodyPr/>
-          <a:lstStyle/>
-          <a:p>
-            <a:r>
-              <a:t>Electronic Control Unit</a:t>
-            </a:r>
-          </a:p>
-          <a:p>
-            <a:r>
-              <a:t>Brain of the vehicle</a:t>
-            </a:r>
-          </a:p>
-          <a:p>
-            <a:r>
-              <a:t>Controls multiple functions</a:t>
-            </a:r>
-          </a:p>
-          <a:p>
-            <a:r>
-              <a:t>Makes vehicle smart &amp; automatic</a:t>
-            </a:r>
-          </a:p>
-        </p:txBody>
-      </p:sp>
       <p:pic>
         <p:nvPicPr>
           <p:cNvPr id="5" name="Picture 4" descr="Electronic Control Unit (ECU)">
@@ -4168,21 +5140,124 @@
           <p:nvPr/>
         </p:nvPicPr>
         <p:blipFill>
-          <a:blip r:embed="rId2"/>
+          <a:blip r:embed="rId2">
+            <a:alphaModFix amt="35000"/>
+          </a:blip>
           <a:stretch>
             <a:fillRect/>
           </a:stretch>
         </p:blipFill>
         <p:spPr>
           <a:xfrm>
-            <a:off x="4337769" y="1606542"/>
-            <a:ext cx="4195878" cy="2732766"/>
+            <a:off x="1631185" y="1607611"/>
+            <a:ext cx="6321819" cy="4117387"/>
           </a:xfrm>
           <a:prstGeom prst="rect">
             <a:avLst/>
           </a:prstGeom>
         </p:spPr>
       </p:pic>
+      <p:sp>
+        <p:nvSpPr>
+          <p:cNvPr id="3" name="Content Placeholder 2"/>
+          <p:cNvSpPr>
+            <a:spLocks noGrp="1"/>
+          </p:cNvSpPr>
+          <p:nvPr>
+            <p:ph idx="1"/>
+          </p:nvPr>
+        </p:nvSpPr>
+        <p:spPr>
+          <a:xfrm>
+            <a:off x="600074" y="1769698"/>
+            <a:ext cx="8018449" cy="3636088"/>
+          </a:xfrm>
+        </p:spPr>
+        <p:txBody>
+          <a:bodyPr>
+            <a:normAutofit lnSpcReduction="10000"/>
+          </a:bodyPr>
+          <a:lstStyle/>
+          <a:p>
+            <a:r>
+              <a:rPr lang="en-GB" sz="1800" dirty="0"/>
+              <a:t>Earlier, vehicles were mainly mechanical systems. With the advancement of technology, electronics were introduced, bringing major changes to the automotive industry.</a:t>
+            </a:r>
+          </a:p>
+          <a:p>
+            <a:r>
+              <a:rPr lang="en-GB" sz="1800" dirty="0"/>
+              <a:t>In the 1970s, the </a:t>
+            </a:r>
+            <a:r>
+              <a:rPr lang="en-GB" sz="1800" b="1" dirty="0"/>
+              <a:t>Electronic Control Unit (ECU)</a:t>
+            </a:r>
+            <a:r>
+              <a:rPr lang="en-GB" sz="1800" dirty="0"/>
+              <a:t> was introduced. Since then, modern vehicles have become </a:t>
+            </a:r>
+            <a:r>
+              <a:rPr lang="en-GB" sz="1800" b="1" dirty="0"/>
+              <a:t>highly dependent on electronic systems</a:t>
+            </a:r>
+            <a:r>
+              <a:rPr lang="en-GB" sz="1800" dirty="0"/>
+              <a:t>.</a:t>
+            </a:r>
+          </a:p>
+          <a:p>
+            <a:r>
+              <a:rPr lang="en-GB" sz="1800" dirty="0"/>
+              <a:t>Today’s vehicles contain many electronic devices, and the ECU is one of the </a:t>
+            </a:r>
+            <a:r>
+              <a:rPr lang="en-GB" sz="1800" b="1" dirty="0"/>
+              <a:t>most important components</a:t>
+            </a:r>
+            <a:r>
+              <a:rPr lang="en-GB" sz="1800" dirty="0"/>
+              <a:t>.</a:t>
+            </a:r>
+          </a:p>
+          <a:p>
+            <a:r>
+              <a:rPr lang="en-GB" sz="1800" dirty="0"/>
+              <a:t>The ECU is known as the </a:t>
+            </a:r>
+            <a:r>
+              <a:rPr lang="en-GB" sz="1800" b="1" dirty="0"/>
+              <a:t>brain of the vehicle</a:t>
+            </a:r>
+            <a:endParaRPr lang="en-GB" sz="1800" dirty="0"/>
+          </a:p>
+          <a:p>
+            <a:r>
+              <a:rPr lang="en-GB" sz="1800" dirty="0"/>
+              <a:t>It </a:t>
+            </a:r>
+            <a:r>
+              <a:rPr lang="en-GB" sz="1800" b="1" dirty="0"/>
+              <a:t>controls multiple functions</a:t>
+            </a:r>
+            <a:r>
+              <a:rPr lang="en-GB" sz="1800" dirty="0"/>
+              <a:t> such as engine, braking, and more</a:t>
+            </a:r>
+          </a:p>
+          <a:p>
+            <a:r>
+              <a:rPr lang="en-GB" sz="1800" dirty="0"/>
+              <a:t>It helps make the vehicle </a:t>
+            </a:r>
+            <a:r>
+              <a:rPr lang="en-GB" sz="1800" b="1" dirty="0"/>
+              <a:t>smart, efficient, and automated</a:t>
+            </a:r>
+            <a:endParaRPr lang="en-GB" sz="1800" dirty="0"/>
+          </a:p>
+        </p:txBody>
+      </p:sp>
     </p:spTree>
   </p:cSld>
   <p:clrMapOvr>
@@ -4210,7 +5285,13 @@
       </p:grpSpPr>
       <p:sp>
         <p:nvSpPr>
-          <p:cNvPr id="2" name="Title 1"/>
+          <p:cNvPr id="2" name="Title 1">
+            <a:extLst>
+              <a:ext uri="{FF2B5EF4-FFF2-40B4-BE49-F238E27FC236}">
+                <a16:creationId xmlns:a16="http://schemas.microsoft.com/office/drawing/2014/main" id="{1767B3FA-D35D-2A07-3774-C609A290E7AA}"/>
+              </a:ext>
+            </a:extLst>
+          </p:cNvPr>
           <p:cNvSpPr>
             <a:spLocks noGrp="1"/>
           </p:cNvSpPr>
@@ -4220,18 +5301,31 @@
         </p:nvSpPr>
         <p:spPr/>
         <p:txBody>
-          <a:bodyPr/>
-          <a:lstStyle/>
-          <a:p>
-            <a:r>
-              <a:t>Main Parts of ECU</a:t>
-            </a:r>
-          </a:p>
-        </p:txBody>
-      </p:sp>
-      <p:sp>
-        <p:nvSpPr>
-          <p:cNvPr id="3" name="Content Placeholder 2"/>
+          <a:bodyPr>
+            <a:normAutofit/>
+          </a:bodyPr>
+          <a:lstStyle/>
+          <a:p>
+            <a:r>
+              <a:rPr lang="en-GB" dirty="0"/>
+              <a:t>Common Types of ECU</a:t>
+            </a:r>
+            <a:br>
+              <a:rPr lang="en-GB" b="1" dirty="0"/>
+            </a:br>
+            <a:endParaRPr lang="en-IN" dirty="0"/>
+          </a:p>
+        </p:txBody>
+      </p:sp>
+      <p:sp>
+        <p:nvSpPr>
+          <p:cNvPr id="3" name="Content Placeholder 2">
+            <a:extLst>
+              <a:ext uri="{FF2B5EF4-FFF2-40B4-BE49-F238E27FC236}">
+                <a16:creationId xmlns:a16="http://schemas.microsoft.com/office/drawing/2014/main" id="{598C9599-7DF7-A9A8-3194-10690D865EB0}"/>
+              </a:ext>
+            </a:extLst>
+          </p:cNvPr>
           <p:cNvSpPr>
             <a:spLocks noGrp="1"/>
           </p:cNvSpPr>
@@ -4241,89 +5335,115 @@
         </p:nvSpPr>
         <p:spPr>
           <a:xfrm>
-            <a:off x="525477" y="1900220"/>
-            <a:ext cx="8018449" cy="3636088"/>
+            <a:off x="525477" y="1879469"/>
+            <a:ext cx="8357266" cy="3636088"/>
           </a:xfrm>
         </p:spPr>
         <p:txBody>
-          <a:bodyPr vert="horz" lIns="91440" tIns="45720" rIns="91440" bIns="45720" rtlCol="0" anchor="t">
-            <a:normAutofit/>
+          <a:bodyPr>
+            <a:normAutofit fontScale="92500" lnSpcReduction="20000"/>
           </a:bodyPr>
           <a:lstStyle/>
           <a:p>
             <a:r>
-              <a:t>Microcontroller – decision making</a:t>
-            </a:r>
-          </a:p>
-          <a:p>
-            <a:r>
-              <a:rPr lang="en-GB"/>
-              <a:t>Memory - stores data</a:t>
-            </a:r>
-          </a:p>
-          <a:p>
-            <a:r>
-              <a:rPr lang="en-GB"/>
-              <a:t>CAN/LIN/Ethernet Transceivers - communication </a:t>
-            </a:r>
-          </a:p>
-          <a:p>
-            <a:r>
-              <a:t>Sensors – take input</a:t>
-            </a:r>
-          </a:p>
-          <a:p>
-            <a:r>
-              <a:t>Actuators – perform action</a:t>
-            </a:r>
-          </a:p>
-          <a:p>
-            <a:r>
-              <a:rPr lang="en-GB"/>
-              <a:t>Clock/Timers - Timing operations </a:t>
-            </a:r>
-            <a:endParaRPr/>
-          </a:p>
-          <a:p>
-            <a:pPr marL="0" indent="0">
-              <a:buNone/>
-            </a:pPr>
-            <a:endParaRPr lang="en-GB"/>
-          </a:p>
-        </p:txBody>
-      </p:sp>
-      <p:pic>
-        <p:nvPicPr>
-          <p:cNvPr id="4" name="Picture 3" descr="Electronic Control Unit">
-            <a:extLst>
-              <a:ext uri="{FF2B5EF4-FFF2-40B4-BE49-F238E27FC236}">
-                <a16:creationId xmlns:a16="http://schemas.microsoft.com/office/drawing/2014/main" id="{18B5B4EC-F7F6-27E9-D2AE-124A10499D17}"/>
-              </a:ext>
-            </a:extLst>
-          </p:cNvPr>
-          <p:cNvPicPr>
-            <a:picLocks noChangeAspect="1"/>
-          </p:cNvPicPr>
-          <p:nvPr/>
-        </p:nvPicPr>
-        <p:blipFill>
-          <a:blip r:embed="rId2"/>
-          <a:srcRect r="-257" b="-385"/>
-          <a:stretch>
-            <a:fillRect/>
-          </a:stretch>
-        </p:blipFill>
-        <p:spPr>
-          <a:xfrm>
-            <a:off x="4900612" y="3390900"/>
-            <a:ext cx="4068939" cy="2647327"/>
-          </a:xfrm>
-          <a:prstGeom prst="rect">
-            <a:avLst/>
-          </a:prstGeom>
-        </p:spPr>
-      </p:pic>
+              <a:rPr lang="en-IN" sz="1900" b="1" dirty="0"/>
+              <a:t>Engine Control Unit (ECU):</a:t>
+            </a:r>
+            <a:r>
+              <a:rPr lang="en-IN" sz="1900" dirty="0"/>
+              <a:t> Controls engine functions like fuel and ignition for smooth performance</a:t>
+            </a:r>
+          </a:p>
+          <a:p>
+            <a:r>
+              <a:rPr lang="en-IN" sz="1900" b="1" dirty="0"/>
+              <a:t>Body Control Module (BCM):</a:t>
+            </a:r>
+            <a:r>
+              <a:rPr lang="en-IN" sz="1900" dirty="0"/>
+              <a:t> Manages features like AC, windows, and door locks</a:t>
+            </a:r>
+          </a:p>
+          <a:p>
+            <a:r>
+              <a:rPr lang="en-IN" sz="1900" b="1" dirty="0"/>
+              <a:t>Transmission Control Unit (TCU):</a:t>
+            </a:r>
+            <a:r>
+              <a:rPr lang="en-IN" sz="1900" dirty="0"/>
+              <a:t> Controls gear shifting using sensor and engine data</a:t>
+            </a:r>
+          </a:p>
+          <a:p>
+            <a:r>
+              <a:rPr lang="en-IN" sz="1900" b="1" dirty="0"/>
+              <a:t>Powertrain Control Module (PCM):</a:t>
+            </a:r>
+            <a:r>
+              <a:rPr lang="en-IN" sz="1900" dirty="0"/>
+              <a:t> Combines ECU and TCU functions into one unit</a:t>
+            </a:r>
+          </a:p>
+          <a:p>
+            <a:r>
+              <a:rPr lang="en-IN" sz="1900" b="1" dirty="0"/>
+              <a:t>Telematics Control Module:</a:t>
+            </a:r>
+            <a:r>
+              <a:rPr lang="en-IN" sz="1900" dirty="0"/>
+              <a:t> Provides GPS, internet, and phone connectivity</a:t>
+            </a:r>
+          </a:p>
+          <a:p>
+            <a:r>
+              <a:rPr lang="en-IN" sz="1900" b="1" dirty="0"/>
+              <a:t>Battery Management System (BMS):</a:t>
+            </a:r>
+            <a:r>
+              <a:rPr lang="en-IN" sz="1900" dirty="0"/>
+              <a:t> Manages and protects batteries in electric vehicles</a:t>
+            </a:r>
+          </a:p>
+          <a:p>
+            <a:endParaRPr lang="en-IN" dirty="0"/>
+          </a:p>
+        </p:txBody>
+      </p:sp>
+      <p:sp>
+        <p:nvSpPr>
+          <p:cNvPr id="5" name="Footer Placeholder 4">
+            <a:extLst>
+              <a:ext uri="{FF2B5EF4-FFF2-40B4-BE49-F238E27FC236}">
+                <a16:creationId xmlns:a16="http://schemas.microsoft.com/office/drawing/2014/main" id="{EC0EC25E-E087-8401-E8F8-E09171B13465}"/>
+              </a:ext>
+            </a:extLst>
+          </p:cNvPr>
+          <p:cNvSpPr>
+            <a:spLocks noGrp="1"/>
+          </p:cNvSpPr>
+          <p:nvPr>
+            <p:ph type="ftr" sz="quarter" idx="11"/>
+          </p:nvPr>
+        </p:nvSpPr>
+        <p:spPr/>
+        <p:txBody>
+          <a:bodyPr/>
+          <a:lstStyle/>
+          <a:p>
+            <a:r>
+              <a:rPr lang="en-US"/>
+              <a:t>
+              </a:t>
+            </a:r>
+          </a:p>
+        </p:txBody>
+      </p:sp>
     </p:spTree>
+    <p:extLst>
+      <p:ext uri="{BB962C8B-B14F-4D97-AF65-F5344CB8AC3E}">
+        <p14:creationId xmlns:p14="http://schemas.microsoft.com/office/powerpoint/2010/main" val="3004135814"/>
+      </p:ext>
+    </p:extLst>
   </p:cSld>
   <p:clrMapOvr>
     <a:masterClrMapping/>
@@ -4350,10 +5470,247 @@
       </p:grpSpPr>
       <p:sp>
         <p:nvSpPr>
-          <p:cNvPr id="3" name="Footer Placeholder 2">
-            <a:extLst>
-              <a:ext uri="{FF2B5EF4-FFF2-40B4-BE49-F238E27FC236}">
-                <a16:creationId xmlns:a16="http://schemas.microsoft.com/office/drawing/2014/main" id="{538142A5-6423-9B50-2F41-AC8371D6DC61}"/>
+          <p:cNvPr id="2" name="Title 1"/>
+          <p:cNvSpPr>
+            <a:spLocks noGrp="1"/>
+          </p:cNvSpPr>
+          <p:nvPr>
+            <p:ph type="title"/>
+          </p:nvPr>
+        </p:nvSpPr>
+        <p:spPr>
+          <a:xfrm>
+            <a:off x="525477" y="922096"/>
+            <a:ext cx="8018449" cy="1127930"/>
+          </a:xfrm>
+        </p:spPr>
+        <p:txBody>
+          <a:bodyPr anchor="t">
+            <a:normAutofit/>
+          </a:bodyPr>
+          <a:lstStyle/>
+          <a:p>
+            <a:r>
+              <a:t>Main Parts of ECU</a:t>
+            </a:r>
+          </a:p>
+        </p:txBody>
+      </p:sp>
+      <p:sp>
+        <p:nvSpPr>
+          <p:cNvPr id="3" name="Content Placeholder 2"/>
+          <p:cNvSpPr>
+            <a:spLocks noGrp="1"/>
+          </p:cNvSpPr>
+          <p:nvPr>
+            <p:ph sz="half" idx="1"/>
+          </p:nvPr>
+        </p:nvSpPr>
+        <p:spPr>
+          <a:xfrm>
+            <a:off x="536539" y="1758569"/>
+            <a:ext cx="4560696" cy="4315659"/>
+          </a:xfrm>
+        </p:spPr>
+        <p:txBody>
+          <a:bodyPr vert="horz" lIns="91440" tIns="45720" rIns="91440" bIns="45720" rtlCol="0">
+            <a:normAutofit/>
+          </a:bodyPr>
+          <a:lstStyle/>
+          <a:p>
+            <a:pPr>
+              <a:lnSpc>
+                <a:spcPct val="100000"/>
+              </a:lnSpc>
+            </a:pPr>
+            <a:r>
+              <a:rPr lang="en-GB" sz="1400" b="1" dirty="0"/>
+              <a:t>Microcontroller</a:t>
+            </a:r>
+            <a:br>
+              <a:rPr lang="en-GB" sz="1400" dirty="0"/>
+            </a:br>
+            <a:r>
+              <a:rPr lang="en-GB" sz="1400" dirty="0"/>
+              <a:t>Small computer that makes decisions</a:t>
+            </a:r>
+          </a:p>
+          <a:p>
+            <a:pPr>
+              <a:lnSpc>
+                <a:spcPct val="100000"/>
+              </a:lnSpc>
+            </a:pPr>
+            <a:r>
+              <a:rPr lang="en-GB" sz="1400" b="1" dirty="0"/>
+              <a:t>Memory</a:t>
+            </a:r>
+            <a:br>
+              <a:rPr lang="en-GB" sz="1400" dirty="0"/>
+            </a:br>
+            <a:r>
+              <a:rPr lang="en-GB" sz="1400" dirty="0"/>
+              <a:t>Stores data and programs (RAM, EEPROM, Flash)</a:t>
+            </a:r>
+          </a:p>
+          <a:p>
+            <a:pPr>
+              <a:lnSpc>
+                <a:spcPct val="100000"/>
+              </a:lnSpc>
+            </a:pPr>
+            <a:r>
+              <a:rPr lang="en-GB" sz="1400" b="1" dirty="0"/>
+              <a:t>Communication</a:t>
+            </a:r>
+            <a:br>
+              <a:rPr lang="en-GB" sz="1400" dirty="0"/>
+            </a:br>
+            <a:r>
+              <a:rPr lang="en-GB" sz="1400" dirty="0"/>
+              <a:t>Connects with other ECUs using </a:t>
+            </a:r>
+            <a:r>
+              <a:rPr lang="en-GB" sz="1400" b="1" dirty="0"/>
+              <a:t>CAN, K-Line, etc.</a:t>
+            </a:r>
+            <a:endParaRPr lang="en-GB" sz="1400" dirty="0"/>
+          </a:p>
+          <a:p>
+            <a:pPr>
+              <a:lnSpc>
+                <a:spcPct val="100000"/>
+              </a:lnSpc>
+            </a:pPr>
+            <a:r>
+              <a:rPr lang="en-GB" sz="1400" b="1" dirty="0"/>
+              <a:t>Software</a:t>
+            </a:r>
+            <a:br>
+              <a:rPr lang="en-GB" sz="1400" dirty="0"/>
+            </a:br>
+            <a:r>
+              <a:rPr lang="en-GB" sz="1400" dirty="0"/>
+              <a:t>Includes </a:t>
+            </a:r>
+            <a:r>
+              <a:rPr lang="en-GB" sz="1400" b="1" dirty="0"/>
+              <a:t>Bootloader and Application Software</a:t>
+            </a:r>
+            <a:r>
+              <a:rPr lang="en-GB" sz="1400" dirty="0"/>
+              <a:t> for control and processing</a:t>
+            </a:r>
+          </a:p>
+          <a:p>
+            <a:pPr>
+              <a:lnSpc>
+                <a:spcPct val="100000"/>
+              </a:lnSpc>
+            </a:pPr>
+            <a:r>
+              <a:rPr lang="en-GB" sz="1400" b="1" dirty="0"/>
+              <a:t>Inputs</a:t>
+            </a:r>
+            <a:br>
+              <a:rPr lang="en-GB" sz="1400" dirty="0"/>
+            </a:br>
+            <a:r>
+              <a:rPr lang="en-GB" sz="1400" dirty="0"/>
+              <a:t>Receives signals from </a:t>
+            </a:r>
+            <a:r>
+              <a:rPr lang="en-GB" sz="1400" b="1" dirty="0"/>
+              <a:t>sensors and other ECUs</a:t>
+            </a:r>
+            <a:r>
+              <a:rPr lang="en-GB" sz="1400" dirty="0"/>
+              <a:t> (</a:t>
+            </a:r>
+            <a:r>
+              <a:rPr lang="en-GB" sz="1400" dirty="0" err="1"/>
+              <a:t>analog</a:t>
+            </a:r>
+            <a:r>
+              <a:rPr lang="en-GB" sz="1400" dirty="0"/>
+              <a:t>/digital)</a:t>
+            </a:r>
+          </a:p>
+          <a:p>
+            <a:pPr>
+              <a:lnSpc>
+                <a:spcPct val="100000"/>
+              </a:lnSpc>
+            </a:pPr>
+            <a:r>
+              <a:rPr lang="en-GB" sz="1400" b="1" dirty="0"/>
+              <a:t>Outputs</a:t>
+            </a:r>
+            <a:br>
+              <a:rPr lang="en-GB" sz="1400" dirty="0"/>
+            </a:br>
+            <a:r>
+              <a:rPr lang="en-GB" sz="1400" dirty="0"/>
+              <a:t>Sends commands to </a:t>
+            </a:r>
+            <a:r>
+              <a:rPr lang="en-GB" sz="1400" b="1" dirty="0"/>
+              <a:t>actuators</a:t>
+            </a:r>
+            <a:r>
+              <a:rPr lang="en-GB" sz="1400" dirty="0"/>
+              <a:t> to perform actions</a:t>
+            </a:r>
+          </a:p>
+          <a:p>
+            <a:pPr marL="0" indent="0">
+              <a:lnSpc>
+                <a:spcPct val="100000"/>
+              </a:lnSpc>
+              <a:buNone/>
+            </a:pPr>
+            <a:endParaRPr lang="en-GB" sz="1100" dirty="0"/>
+          </a:p>
+        </p:txBody>
+      </p:sp>
+      <p:pic>
+        <p:nvPicPr>
+          <p:cNvPr id="4" name="Picture 3" descr="Electronic Control Unit">
+            <a:extLst>
+              <a:ext uri="{FF2B5EF4-FFF2-40B4-BE49-F238E27FC236}">
+                <a16:creationId xmlns:a16="http://schemas.microsoft.com/office/drawing/2014/main" id="{18B5B4EC-F7F6-27E9-D2AE-124A10499D17}"/>
+              </a:ext>
+            </a:extLst>
+          </p:cNvPr>
+          <p:cNvPicPr>
+            <a:picLocks noChangeAspect="1"/>
+          </p:cNvPicPr>
+          <p:nvPr/>
+        </p:nvPicPr>
+        <p:blipFill>
+          <a:blip r:embed="rId2"/>
+          <a:srcRect r="-257" b="-385"/>
+          <a:stretch>
+            <a:fillRect/>
+          </a:stretch>
+        </p:blipFill>
+        <p:spPr>
+          <a:xfrm>
+            <a:off x="5097235" y="3366449"/>
+            <a:ext cx="3914775" cy="2606649"/>
+          </a:xfrm>
+          <a:prstGeom prst="rect">
+            <a:avLst/>
+          </a:prstGeom>
+          <a:noFill/>
+        </p:spPr>
+      </p:pic>
+      <p:sp>
+        <p:nvSpPr>
+          <p:cNvPr id="11" name="Footer Placeholder 5">
+            <a:extLst>
+              <a:ext uri="{FF2B5EF4-FFF2-40B4-BE49-F238E27FC236}">
+                <a16:creationId xmlns:a16="http://schemas.microsoft.com/office/drawing/2014/main" id="{C5518BD9-96DA-BAEA-934E-18851747C9BE}"/>
               </a:ext>
             </a:extLst>
           </p:cNvPr>
@@ -4364,11 +5721,21 @@
             <p:ph type="ftr" sz="quarter" idx="11"/>
           </p:nvPr>
         </p:nvSpPr>
-        <p:spPr/>
+        <p:spPr>
+          <a:xfrm>
+            <a:off x="536538" y="6356351"/>
+            <a:ext cx="3404795" cy="365125"/>
+          </a:xfrm>
+        </p:spPr>
         <p:txBody>
           <a:bodyPr/>
           <a:lstStyle/>
           <a:p>
+            <a:pPr>
+              <a:spcAft>
+                <a:spcPts val="600"/>
+              </a:spcAft>
+            </a:pPr>
             <a:r>
               <a:rPr lang="en-US"/>
               <a:t>
@@ -4377,20 +5744,39 @@
           </a:p>
         </p:txBody>
       </p:sp>
-      <p:sp>
-        <p:nvSpPr>
-          <p:cNvPr id="4" name="Slide Number Placeholder 3">
-            <a:extLst>
-              <a:ext uri="{FF2B5EF4-FFF2-40B4-BE49-F238E27FC236}">
-                <a16:creationId xmlns:a16="http://schemas.microsoft.com/office/drawing/2014/main" id="{5805283B-F6BC-DC94-79CF-5AEB25D7B574}"/>
-              </a:ext>
-            </a:extLst>
-          </p:cNvPr>
-          <p:cNvSpPr>
-            <a:spLocks noGrp="1"/>
-          </p:cNvSpPr>
-          <p:nvPr>
-            <p:ph type="sldNum" sz="quarter" idx="12"/>
+    </p:spTree>
+  </p:cSld>
+  <p:clrMapOvr>
+    <a:masterClrMapping/>
+  </p:clrMapOvr>
+</p:sld>
+</file>
+
+<file path=ppt/slides/slide7.xml><?xml version="1.0" encoding="utf-8"?>
+<p:sld xmlns:a="http://schemas.openxmlformats.org/drawingml/2006/main" xmlns:r="http://schemas.openxmlformats.org/officeDocument/2006/relationships" xmlns:p="http://schemas.openxmlformats.org/presentationml/2006/main">
+  <p:cSld>
+    <p:spTree>
+      <p:nvGrpSpPr>
+        <p:cNvPr id="1" name=""/>
+        <p:cNvGrpSpPr/>
+        <p:nvPr/>
+      </p:nvGrpSpPr>
+      <p:grpSpPr>
+        <a:xfrm>
+          <a:off x="0" y="0"/>
+          <a:ext cx="0" cy="0"/>
+          <a:chOff x="0" y="0"/>
+          <a:chExt cx="0" cy="0"/>
+        </a:xfrm>
+      </p:grpSpPr>
+      <p:sp>
+        <p:nvSpPr>
+          <p:cNvPr id="2" name="Title 1"/>
+          <p:cNvSpPr>
+            <a:spLocks noGrp="1"/>
+          </p:cNvSpPr>
+          <p:nvPr>
+            <p:ph type="title"/>
           </p:nvPr>
         </p:nvSpPr>
         <p:spPr/>
@@ -4398,11 +5784,134 @@
           <a:bodyPr/>
           <a:lstStyle/>
           <a:p>
-            <a:fld id="{E30AF5A0-43BB-4336-8627-9123B9144D80}" type="slidenum">
-              <a:rPr lang="en-US" dirty="0"/>
-              <a:t>6</a:t>
-            </a:fld>
-            <a:endParaRPr lang="en-US"/>
+            <a:r>
+              <a:t>How ECUs Communicate</a:t>
+            </a:r>
+          </a:p>
+        </p:txBody>
+      </p:sp>
+      <p:sp>
+        <p:nvSpPr>
+          <p:cNvPr id="3" name="Content Placeholder 2"/>
+          <p:cNvSpPr>
+            <a:spLocks noGrp="1"/>
+          </p:cNvSpPr>
+          <p:nvPr>
+            <p:ph idx="1"/>
+          </p:nvPr>
+        </p:nvSpPr>
+        <p:spPr>
+          <a:xfrm>
+            <a:off x="525476" y="1901880"/>
+            <a:ext cx="8018449" cy="3530091"/>
+          </a:xfrm>
+        </p:spPr>
+        <p:txBody>
+          <a:bodyPr>
+            <a:normAutofit lnSpcReduction="10000"/>
+          </a:bodyPr>
+          <a:lstStyle/>
+          <a:p>
+            <a:r>
+              <a:rPr lang="en-GB" dirty="0"/>
+              <a:t>A vehicle has multiple ECUs working together</a:t>
+            </a:r>
+          </a:p>
+          <a:p>
+            <a:r>
+              <a:rPr lang="en-GB" dirty="0"/>
+              <a:t>ECUs share data continuously for proper functioning</a:t>
+            </a:r>
+          </a:p>
+          <a:p>
+            <a:r>
+              <a:rPr lang="en-GB" dirty="0"/>
+              <a:t>They communicate using a common network (bus)</a:t>
+            </a:r>
+          </a:p>
+          <a:p>
+            <a:r>
+              <a:rPr lang="en-GB" dirty="0"/>
+              <a:t>One ECU sends a message to all ECUs</a:t>
+            </a:r>
+          </a:p>
+          <a:p>
+            <a:r>
+              <a:rPr lang="en-GB" dirty="0"/>
+              <a:t>All ECUs receive the message at the same time</a:t>
+            </a:r>
+          </a:p>
+          <a:p>
+            <a:r>
+              <a:rPr lang="en-GB" dirty="0"/>
+              <a:t>Each ECU uses it if needed, otherwise ignores it</a:t>
+            </a:r>
+          </a:p>
+          <a:p>
+            <a:r>
+              <a:rPr lang="en-GB" dirty="0"/>
+              <a:t>Communication is fast and real-time</a:t>
+            </a:r>
+          </a:p>
+          <a:p>
+            <a:r>
+              <a:rPr lang="en-GB" dirty="0"/>
+              <a:t>Examples: CAN, LIN, MOST</a:t>
+            </a:r>
+          </a:p>
+        </p:txBody>
+      </p:sp>
+    </p:spTree>
+  </p:cSld>
+  <p:clrMapOvr>
+    <a:masterClrMapping/>
+  </p:clrMapOvr>
+</p:sld>
+</file>
+
+<file path=ppt/slides/slide8.xml><?xml version="1.0" encoding="utf-8"?>
+<p:sld xmlns:a="http://schemas.openxmlformats.org/drawingml/2006/main" xmlns:r="http://schemas.openxmlformats.org/officeDocument/2006/relationships" xmlns:p="http://schemas.openxmlformats.org/presentationml/2006/main">
+  <p:cSld>
+    <p:spTree>
+      <p:nvGrpSpPr>
+        <p:cNvPr id="1" name=""/>
+        <p:cNvGrpSpPr/>
+        <p:nvPr/>
+      </p:nvGrpSpPr>
+      <p:grpSpPr>
+        <a:xfrm>
+          <a:off x="0" y="0"/>
+          <a:ext cx="0" cy="0"/>
+          <a:chOff x="0" y="0"/>
+          <a:chExt cx="0" cy="0"/>
+        </a:xfrm>
+      </p:grpSpPr>
+      <p:sp>
+        <p:nvSpPr>
+          <p:cNvPr id="3" name="Footer Placeholder 2">
+            <a:extLst>
+              <a:ext uri="{FF2B5EF4-FFF2-40B4-BE49-F238E27FC236}">
+                <a16:creationId xmlns:a16="http://schemas.microsoft.com/office/drawing/2014/main" id="{538142A5-6423-9B50-2F41-AC8371D6DC61}"/>
+              </a:ext>
+            </a:extLst>
+          </p:cNvPr>
+          <p:cNvSpPr>
+            <a:spLocks noGrp="1"/>
+          </p:cNvSpPr>
+          <p:nvPr>
+            <p:ph type="ftr" sz="quarter" idx="11"/>
+          </p:nvPr>
+        </p:nvSpPr>
+        <p:spPr/>
+        <p:txBody>
+          <a:bodyPr/>
+          <a:lstStyle/>
+          <a:p>
+            <a:r>
+              <a:rPr lang="en-US"/>
+              <a:t>
+              </a:t>
+            </a:r>
           </a:p>
         </p:txBody>
       </p:sp>
@@ -4449,602 +5958,6 @@
 </p:sld>
 </file>
 
-<file path=ppt/slides/slide7.xml><?xml version="1.0" encoding="utf-8"?>
-<p:sld xmlns:a="http://schemas.openxmlformats.org/drawingml/2006/main" xmlns:r="http://schemas.openxmlformats.org/officeDocument/2006/relationships" xmlns:p="http://schemas.openxmlformats.org/presentationml/2006/main">
-  <p:cSld>
-    <p:spTree>
-      <p:nvGrpSpPr>
-        <p:cNvPr id="1" name=""/>
-        <p:cNvGrpSpPr/>
-        <p:nvPr/>
-      </p:nvGrpSpPr>
-      <p:grpSpPr>
-        <a:xfrm>
-          <a:off x="0" y="0"/>
-          <a:ext cx="0" cy="0"/>
-          <a:chOff x="0" y="0"/>
-          <a:chExt cx="0" cy="0"/>
-        </a:xfrm>
-      </p:grpSpPr>
-      <p:sp>
-        <p:nvSpPr>
-          <p:cNvPr id="2" name="Title 1"/>
-          <p:cNvSpPr>
-            <a:spLocks noGrp="1"/>
-          </p:cNvSpPr>
-          <p:nvPr>
-            <p:ph type="title"/>
-          </p:nvPr>
-        </p:nvSpPr>
-        <p:spPr/>
-        <p:txBody>
-          <a:bodyPr/>
-          <a:lstStyle/>
-          <a:p>
-            <a:r>
-              <a:t>How ECUs Communicate</a:t>
-            </a:r>
-          </a:p>
-        </p:txBody>
-      </p:sp>
-      <p:sp>
-        <p:nvSpPr>
-          <p:cNvPr id="3" name="Content Placeholder 2"/>
-          <p:cNvSpPr>
-            <a:spLocks noGrp="1"/>
-          </p:cNvSpPr>
-          <p:nvPr>
-            <p:ph idx="1"/>
-          </p:nvPr>
-        </p:nvSpPr>
-        <p:spPr>
-          <a:xfrm>
-            <a:off x="525477" y="2305032"/>
-            <a:ext cx="8018449" cy="1885870"/>
-          </a:xfrm>
-        </p:spPr>
-        <p:txBody>
-          <a:bodyPr/>
-          <a:lstStyle/>
-          <a:p>
-            <a:r>
-              <a:t>Multiple ECUs in one vehicle</a:t>
-            </a:r>
-          </a:p>
-          <a:p>
-            <a:r>
-              <a:t>They share data</a:t>
-            </a:r>
-          </a:p>
-          <a:p>
-            <a:r>
-              <a:t>Use communication networks</a:t>
-            </a:r>
-          </a:p>
-          <a:p>
-            <a:r>
-              <a:t>Example: CAN, LIN</a:t>
-            </a:r>
-          </a:p>
-        </p:txBody>
-      </p:sp>
-      <p:sp>
-        <p:nvSpPr>
-          <p:cNvPr id="5" name="Rectangle 4">
-            <a:extLst>
-              <a:ext uri="{FF2B5EF4-FFF2-40B4-BE49-F238E27FC236}">
-                <a16:creationId xmlns:a16="http://schemas.microsoft.com/office/drawing/2014/main" id="{78C672AC-A2EE-F69D-F380-EF3F99CC12FA}"/>
-              </a:ext>
-            </a:extLst>
-          </p:cNvPr>
-          <p:cNvSpPr/>
-          <p:nvPr/>
-        </p:nvSpPr>
-        <p:spPr>
-          <a:xfrm>
-            <a:off x="769437" y="5609541"/>
-            <a:ext cx="7779392" cy="117105"/>
-          </a:xfrm>
-          <a:prstGeom prst="rect">
-            <a:avLst/>
-          </a:prstGeom>
-          <a:solidFill>
-            <a:schemeClr val="bg1">
-              <a:lumMod val="65000"/>
-            </a:schemeClr>
-          </a:solidFill>
-        </p:spPr>
-        <p:style>
-          <a:lnRef idx="2">
-            <a:schemeClr val="accent1">
-              <a:shade val="15000"/>
-            </a:schemeClr>
-          </a:lnRef>
-          <a:fillRef idx="1">
-            <a:schemeClr val="accent1"/>
-          </a:fillRef>
-          <a:effectRef idx="0">
-            <a:schemeClr val="accent1"/>
-          </a:effectRef>
-          <a:fontRef idx="minor">
-            <a:schemeClr val="lt1"/>
-          </a:fontRef>
-        </p:style>
-        <p:txBody>
-          <a:bodyPr rtlCol="0" anchor="ctr"/>
-          <a:lstStyle/>
-          <a:p>
-            <a:pPr algn="ctr"/>
-            <a:endParaRPr lang="en-GB"/>
-          </a:p>
-        </p:txBody>
-      </p:sp>
-      <p:sp>
-        <p:nvSpPr>
-          <p:cNvPr id="6" name="Call-out: Down Arrow 5">
-            <a:extLst>
-              <a:ext uri="{FF2B5EF4-FFF2-40B4-BE49-F238E27FC236}">
-                <a16:creationId xmlns:a16="http://schemas.microsoft.com/office/drawing/2014/main" id="{B7B50499-D078-9A48-921D-085327CE4579}"/>
-              </a:ext>
-            </a:extLst>
-          </p:cNvPr>
-          <p:cNvSpPr/>
-          <p:nvPr/>
-        </p:nvSpPr>
-        <p:spPr>
-          <a:xfrm>
-            <a:off x="1147923" y="4825179"/>
-            <a:ext cx="860942" cy="786317"/>
-          </a:xfrm>
-          <a:prstGeom prst="downArrowCallout">
-            <a:avLst/>
-          </a:prstGeom>
-          <a:solidFill>
-            <a:schemeClr val="bg1">
-              <a:lumMod val="65000"/>
-            </a:schemeClr>
-          </a:solidFill>
-        </p:spPr>
-        <p:style>
-          <a:lnRef idx="2">
-            <a:schemeClr val="accent1">
-              <a:shade val="15000"/>
-            </a:schemeClr>
-          </a:lnRef>
-          <a:fillRef idx="1">
-            <a:schemeClr val="accent1"/>
-          </a:fillRef>
-          <a:effectRef idx="0">
-            <a:schemeClr val="accent1"/>
-          </a:effectRef>
-          <a:fontRef idx="minor">
-            <a:schemeClr val="lt1"/>
-          </a:fontRef>
-        </p:style>
-        <p:txBody>
-          <a:bodyPr rtlCol="0" anchor="ctr"/>
-          <a:lstStyle/>
-          <a:p>
-            <a:pPr algn="ctr"/>
-            <a:r>
-              <a:rPr lang="en-GB"/>
-              <a:t>ECU 1</a:t>
-            </a:r>
-            <a:endParaRPr lang="en-US"/>
-          </a:p>
-        </p:txBody>
-      </p:sp>
-      <p:sp>
-        <p:nvSpPr>
-          <p:cNvPr id="7" name="Call-out: Down Arrow 6">
-            <a:extLst>
-              <a:ext uri="{FF2B5EF4-FFF2-40B4-BE49-F238E27FC236}">
-                <a16:creationId xmlns:a16="http://schemas.microsoft.com/office/drawing/2014/main" id="{368B43A9-5FBF-2A2C-C536-DCBF3D716956}"/>
-              </a:ext>
-            </a:extLst>
-          </p:cNvPr>
-          <p:cNvSpPr/>
-          <p:nvPr/>
-        </p:nvSpPr>
-        <p:spPr>
-          <a:xfrm>
-            <a:off x="3041016" y="4825179"/>
-            <a:ext cx="860942" cy="786317"/>
-          </a:xfrm>
-          <a:prstGeom prst="downArrowCallout">
-            <a:avLst/>
-          </a:prstGeom>
-          <a:solidFill>
-            <a:schemeClr val="bg1">
-              <a:lumMod val="65000"/>
-            </a:schemeClr>
-          </a:solidFill>
-        </p:spPr>
-        <p:style>
-          <a:lnRef idx="2">
-            <a:schemeClr val="accent1">
-              <a:shade val="15000"/>
-            </a:schemeClr>
-          </a:lnRef>
-          <a:fillRef idx="1">
-            <a:schemeClr val="accent1"/>
-          </a:fillRef>
-          <a:effectRef idx="0">
-            <a:schemeClr val="accent1"/>
-          </a:effectRef>
-          <a:fontRef idx="minor">
-            <a:schemeClr val="lt1"/>
-          </a:fontRef>
-        </p:style>
-        <p:txBody>
-          <a:bodyPr lIns="91440" tIns="45720" rIns="91440" bIns="45720" rtlCol="0" anchor="ctr"/>
-          <a:lstStyle/>
-          <a:p>
-            <a:pPr algn="ctr"/>
-            <a:r>
-              <a:rPr lang="en-GB"/>
-              <a:t>ECU 2</a:t>
-            </a:r>
-            <a:endParaRPr lang="en-US"/>
-          </a:p>
-        </p:txBody>
-      </p:sp>
-      <p:sp>
-        <p:nvSpPr>
-          <p:cNvPr id="8" name="Call-out: Down Arrow 7">
-            <a:extLst>
-              <a:ext uri="{FF2B5EF4-FFF2-40B4-BE49-F238E27FC236}">
-                <a16:creationId xmlns:a16="http://schemas.microsoft.com/office/drawing/2014/main" id="{EE378AEA-DB09-AC54-C05E-451BEC97F017}"/>
-              </a:ext>
-            </a:extLst>
-          </p:cNvPr>
-          <p:cNvSpPr/>
-          <p:nvPr/>
-        </p:nvSpPr>
-        <p:spPr>
-          <a:xfrm>
-            <a:off x="5231766" y="4825179"/>
-            <a:ext cx="860942" cy="786317"/>
-          </a:xfrm>
-          <a:prstGeom prst="downArrowCallout">
-            <a:avLst/>
-          </a:prstGeom>
-          <a:solidFill>
-            <a:schemeClr val="bg1">
-              <a:lumMod val="65000"/>
-            </a:schemeClr>
-          </a:solidFill>
-        </p:spPr>
-        <p:style>
-          <a:lnRef idx="2">
-            <a:schemeClr val="accent1">
-              <a:shade val="15000"/>
-            </a:schemeClr>
-          </a:lnRef>
-          <a:fillRef idx="1">
-            <a:schemeClr val="accent1"/>
-          </a:fillRef>
-          <a:effectRef idx="0">
-            <a:schemeClr val="accent1"/>
-          </a:effectRef>
-          <a:fontRef idx="minor">
-            <a:schemeClr val="lt1"/>
-          </a:fontRef>
-        </p:style>
-        <p:txBody>
-          <a:bodyPr lIns="91440" tIns="45720" rIns="91440" bIns="45720" rtlCol="0" anchor="ctr"/>
-          <a:lstStyle/>
-          <a:p>
-            <a:pPr algn="ctr"/>
-            <a:r>
-              <a:rPr lang="en-GB"/>
-              <a:t>ECU 3</a:t>
-            </a:r>
-            <a:endParaRPr lang="en-US"/>
-          </a:p>
-        </p:txBody>
-      </p:sp>
-      <p:sp>
-        <p:nvSpPr>
-          <p:cNvPr id="9" name="Call-out: Down Arrow 8">
-            <a:extLst>
-              <a:ext uri="{FF2B5EF4-FFF2-40B4-BE49-F238E27FC236}">
-                <a16:creationId xmlns:a16="http://schemas.microsoft.com/office/drawing/2014/main" id="{FCF11149-C543-C8E8-1885-E2654F39676E}"/>
-              </a:ext>
-            </a:extLst>
-          </p:cNvPr>
-          <p:cNvSpPr/>
-          <p:nvPr/>
-        </p:nvSpPr>
-        <p:spPr>
-          <a:xfrm>
-            <a:off x="7124860" y="4825179"/>
-            <a:ext cx="860942" cy="786317"/>
-          </a:xfrm>
-          <a:prstGeom prst="downArrowCallout">
-            <a:avLst/>
-          </a:prstGeom>
-          <a:solidFill>
-            <a:schemeClr val="bg1">
-              <a:lumMod val="65000"/>
-            </a:schemeClr>
-          </a:solidFill>
-        </p:spPr>
-        <p:style>
-          <a:lnRef idx="2">
-            <a:schemeClr val="accent1">
-              <a:shade val="15000"/>
-            </a:schemeClr>
-          </a:lnRef>
-          <a:fillRef idx="1">
-            <a:schemeClr val="accent1"/>
-          </a:fillRef>
-          <a:effectRef idx="0">
-            <a:schemeClr val="accent1"/>
-          </a:effectRef>
-          <a:fontRef idx="minor">
-            <a:schemeClr val="lt1"/>
-          </a:fontRef>
-        </p:style>
-        <p:txBody>
-          <a:bodyPr lIns="91440" tIns="45720" rIns="91440" bIns="45720" rtlCol="0" anchor="ctr"/>
-          <a:lstStyle/>
-          <a:p>
-            <a:pPr algn="ctr"/>
-            <a:r>
-              <a:rPr lang="en-GB"/>
-              <a:t>ECU 4</a:t>
-            </a:r>
-            <a:endParaRPr lang="en-US"/>
-          </a:p>
-        </p:txBody>
-      </p:sp>
-      <p:sp>
-        <p:nvSpPr>
-          <p:cNvPr id="10" name="TextBox 9">
-            <a:extLst>
-              <a:ext uri="{FF2B5EF4-FFF2-40B4-BE49-F238E27FC236}">
-                <a16:creationId xmlns:a16="http://schemas.microsoft.com/office/drawing/2014/main" id="{D8B3BEDB-3D1E-052A-4B08-B5432CA35148}"/>
-              </a:ext>
-            </a:extLst>
-          </p:cNvPr>
-          <p:cNvSpPr txBox="1"/>
-          <p:nvPr/>
-        </p:nvSpPr>
-        <p:spPr>
-          <a:xfrm>
-            <a:off x="3917169" y="5745653"/>
-            <a:ext cx="1311371" cy="369332"/>
-          </a:xfrm>
-          <a:prstGeom prst="rect">
-            <a:avLst/>
-          </a:prstGeom>
-          <a:noFill/>
-        </p:spPr>
-        <p:txBody>
-          <a:bodyPr rot="0" spcFirstLastPara="0" vertOverflow="overflow" horzOverflow="overflow" vert="horz" wrap="square" lIns="91440" tIns="45720" rIns="91440" bIns="45720" numCol="1" spcCol="0" rtlCol="0" fromWordArt="0" anchor="t" anchorCtr="0" forceAA="0" compatLnSpc="1">
-            <a:prstTxWarp prst="textNoShape">
-              <a:avLst/>
-            </a:prstTxWarp>
-            <a:spAutoFit/>
-          </a:bodyPr>
-          <a:lstStyle/>
-          <a:p>
-            <a:r>
-              <a:rPr lang="en-GB"/>
-              <a:t>CAN Bus</a:t>
-            </a:r>
-          </a:p>
-        </p:txBody>
-      </p:sp>
-    </p:spTree>
-  </p:cSld>
-  <p:clrMapOvr>
-    <a:masterClrMapping/>
-  </p:clrMapOvr>
-</p:sld>
-</file>
-
-<file path=ppt/slides/slide8.xml><?xml version="1.0" encoding="utf-8"?>
-<p:sld xmlns:a="http://schemas.openxmlformats.org/drawingml/2006/main" xmlns:r="http://schemas.openxmlformats.org/officeDocument/2006/relationships" xmlns:p="http://schemas.openxmlformats.org/presentationml/2006/main">
-  <p:cSld>
-    <p:spTree>
-      <p:nvGrpSpPr>
-        <p:cNvPr id="1" name=""/>
-        <p:cNvGrpSpPr/>
-        <p:nvPr/>
-      </p:nvGrpSpPr>
-      <p:grpSpPr>
-        <a:xfrm>
-          <a:off x="0" y="0"/>
-          <a:ext cx="0" cy="0"/>
-          <a:chOff x="0" y="0"/>
-          <a:chExt cx="0" cy="0"/>
-        </a:xfrm>
-      </p:grpSpPr>
-      <p:sp>
-        <p:nvSpPr>
-          <p:cNvPr id="4" name="Date Placeholder 3">
-            <a:extLst>
-              <a:ext uri="{FF2B5EF4-FFF2-40B4-BE49-F238E27FC236}">
-                <a16:creationId xmlns:a16="http://schemas.microsoft.com/office/drawing/2014/main" id="{163484DC-31FE-13E9-2CE3-D233F59688C2}"/>
-              </a:ext>
-            </a:extLst>
-          </p:cNvPr>
-          <p:cNvSpPr>
-            <a:spLocks noGrp="1"/>
-          </p:cNvSpPr>
-          <p:nvPr>
-            <p:ph type="dt" sz="half" idx="10"/>
-          </p:nvPr>
-        </p:nvSpPr>
-        <p:spPr/>
-        <p:txBody>
-          <a:bodyPr/>
-          <a:lstStyle/>
-          <a:p>
-            <a:fld id="{88567D16-BFC2-4788-A8D6-4B3BC114365C}" type="datetime1">
-              <a:t>5/25/2026</a:t>
-            </a:fld>
-            <a:endParaRPr lang="en-US"/>
-          </a:p>
-        </p:txBody>
-      </p:sp>
-      <p:sp>
-        <p:nvSpPr>
-          <p:cNvPr id="5" name="Footer Placeholder 4">
-            <a:extLst>
-              <a:ext uri="{FF2B5EF4-FFF2-40B4-BE49-F238E27FC236}">
-                <a16:creationId xmlns:a16="http://schemas.microsoft.com/office/drawing/2014/main" id="{B074B7E1-CCE3-7E0C-085E-EC35B21B4BEB}"/>
-              </a:ext>
-            </a:extLst>
-          </p:cNvPr>
-          <p:cNvSpPr>
-            <a:spLocks noGrp="1"/>
-          </p:cNvSpPr>
-          <p:nvPr>
-            <p:ph type="ftr" sz="quarter" idx="11"/>
-          </p:nvPr>
-        </p:nvSpPr>
-        <p:spPr/>
-        <p:txBody>
-          <a:bodyPr/>
-          <a:lstStyle/>
-          <a:p>
-            <a:r>
-              <a:rPr lang="en-US"/>
-              <a:t>
-              </a:t>
-            </a:r>
-          </a:p>
-        </p:txBody>
-      </p:sp>
-      <p:sp>
-        <p:nvSpPr>
-          <p:cNvPr id="6" name="Slide Number Placeholder 5">
-            <a:extLst>
-              <a:ext uri="{FF2B5EF4-FFF2-40B4-BE49-F238E27FC236}">
-                <a16:creationId xmlns:a16="http://schemas.microsoft.com/office/drawing/2014/main" id="{61939984-5E46-934B-015B-624934A1E484}"/>
-              </a:ext>
-            </a:extLst>
-          </p:cNvPr>
-          <p:cNvSpPr>
-            <a:spLocks noGrp="1"/>
-          </p:cNvSpPr>
-          <p:nvPr>
-            <p:ph type="sldNum" sz="quarter" idx="12"/>
-          </p:nvPr>
-        </p:nvSpPr>
-        <p:spPr/>
-        <p:txBody>
-          <a:bodyPr/>
-          <a:lstStyle/>
-          <a:p>
-            <a:fld id="{E30AF5A0-43BB-4336-8627-9123B9144D80}" type="slidenum">
-              <a:rPr lang="en-US" dirty="0"/>
-              <a:t>8</a:t>
-            </a:fld>
-            <a:endParaRPr lang="en-US"/>
-          </a:p>
-        </p:txBody>
-      </p:sp>
-      <p:sp>
-        <p:nvSpPr>
-          <p:cNvPr id="7" name="Title 3">
-            <a:extLst>
-              <a:ext uri="{FF2B5EF4-FFF2-40B4-BE49-F238E27FC236}">
-                <a16:creationId xmlns:a16="http://schemas.microsoft.com/office/drawing/2014/main" id="{A68B173E-FF15-6269-36AE-1D2809EA743A}"/>
-              </a:ext>
-            </a:extLst>
-          </p:cNvPr>
-          <p:cNvSpPr>
-            <a:spLocks noGrp="1"/>
-          </p:cNvSpPr>
-          <p:nvPr/>
-        </p:nvSpPr>
-        <p:spPr>
-          <a:xfrm>
-            <a:off x="313100" y="979107"/>
-            <a:ext cx="9029770" cy="737394"/>
-          </a:xfrm>
-          <a:prstGeom prst="rect">
-            <a:avLst/>
-          </a:prstGeom>
-        </p:spPr>
-        <p:txBody>
-          <a:bodyPr vert="horz" lIns="91440" tIns="45720" rIns="91440" bIns="45720" rtlCol="0" anchor="ctr">
-            <a:noAutofit/>
-          </a:bodyPr>
-          <a:lstStyle>
-            <a:lvl1pPr algn="l" defTabSz="914400" rtl="0" eaLnBrk="1" latinLnBrk="0" hangingPunct="1">
-              <a:lnSpc>
-                <a:spcPct val="90000"/>
-              </a:lnSpc>
-              <a:spcBef>
-                <a:spcPct val="0"/>
-              </a:spcBef>
-              <a:buNone/>
-              <a:defRPr sz="4400" kern="1200">
-                <a:solidFill>
-                  <a:schemeClr val="tx1"/>
-                </a:solidFill>
-                <a:latin typeface="+mj-lt"/>
-                <a:ea typeface="+mj-ea"/>
-                <a:cs typeface="+mj-cs"/>
-              </a:defRPr>
-            </a:lvl1pPr>
-          </a:lstStyle>
-          <a:p>
-            <a:r>
-              <a:rPr lang="en-US" sz="2800" cap="all" spc="30"/>
-              <a:t>CAN BUS Network Diagram and ECU interaction</a:t>
-            </a:r>
-          </a:p>
-        </p:txBody>
-      </p:sp>
-      <p:pic>
-        <p:nvPicPr>
-          <p:cNvPr id="2" name="Picture 1" descr="A diagram of a network&#10;&#10;AI-generated content may be incorrect.">
-            <a:extLst>
-              <a:ext uri="{FF2B5EF4-FFF2-40B4-BE49-F238E27FC236}">
-                <a16:creationId xmlns:a16="http://schemas.microsoft.com/office/drawing/2014/main" id="{2E6D4ABE-057C-9EA5-227C-98D101B5050C}"/>
-              </a:ext>
-            </a:extLst>
-          </p:cNvPr>
-          <p:cNvPicPr>
-            <a:picLocks noChangeAspect="1"/>
-          </p:cNvPicPr>
-          <p:nvPr/>
-        </p:nvPicPr>
-        <p:blipFill>
-          <a:blip r:embed="rId2"/>
-          <a:stretch>
-            <a:fillRect/>
-          </a:stretch>
-        </p:blipFill>
-        <p:spPr>
-          <a:xfrm>
-            <a:off x="150019" y="1714500"/>
-            <a:ext cx="8843962" cy="4976812"/>
-          </a:xfrm>
-          <a:prstGeom prst="rect">
-            <a:avLst/>
-          </a:prstGeom>
-        </p:spPr>
-      </p:pic>
-    </p:spTree>
-    <p:extLst>
-      <p:ext uri="{BB962C8B-B14F-4D97-AF65-F5344CB8AC3E}">
-        <p14:creationId xmlns:p14="http://schemas.microsoft.com/office/powerpoint/2010/main" val="334398325"/>
-      </p:ext>
-    </p:extLst>
-  </p:cSld>
-  <p:clrMapOvr>
-    <a:masterClrMapping/>
-  </p:clrMapOvr>
-</p:sld>
-</file>
-
 <file path=ppt/slides/slide9.xml><?xml version="1.0" encoding="utf-8"?>
 <p:sld xmlns:a="http://schemas.openxmlformats.org/drawingml/2006/main" xmlns:r="http://schemas.openxmlformats.org/officeDocument/2006/relationships" xmlns:p="http://schemas.openxmlformats.org/presentationml/2006/main">
   <p:cSld>
@@ -5064,38 +5977,133 @@
       </p:grpSpPr>
       <p:sp>
         <p:nvSpPr>
-          <p:cNvPr id="2" name="Title 1">
-            <a:extLst>
-              <a:ext uri="{FF2B5EF4-FFF2-40B4-BE49-F238E27FC236}">
-                <a16:creationId xmlns:a16="http://schemas.microsoft.com/office/drawing/2014/main" id="{A78B0F1E-9BED-F44D-57C6-7AFAC8FF1E2F}"/>
-              </a:ext>
-            </a:extLst>
-          </p:cNvPr>
-          <p:cNvSpPr>
-            <a:spLocks noGrp="1"/>
-          </p:cNvSpPr>
-          <p:nvPr>
-            <p:ph type="title"/>
-          </p:nvPr>
-        </p:nvSpPr>
-        <p:spPr/>
+          <p:cNvPr id="5" name="Text Placeholder 4">
+            <a:extLst>
+              <a:ext uri="{FF2B5EF4-FFF2-40B4-BE49-F238E27FC236}">
+                <a16:creationId xmlns:a16="http://schemas.microsoft.com/office/drawing/2014/main" id="{D9A70F05-DE4B-A8BD-C5FD-CF27B097E355}"/>
+              </a:ext>
+            </a:extLst>
+          </p:cNvPr>
+          <p:cNvSpPr>
+            <a:spLocks noGrp="1"/>
+          </p:cNvSpPr>
+          <p:nvPr>
+            <p:ph type="body" sz="quarter" idx="3"/>
+          </p:nvPr>
+        </p:nvSpPr>
+        <p:spPr>
+          <a:xfrm>
+            <a:off x="4629150" y="603479"/>
+            <a:ext cx="3887391" cy="657225"/>
+          </a:xfrm>
+        </p:spPr>
         <p:txBody>
           <a:bodyPr/>
           <a:lstStyle/>
           <a:p>
             <a:r>
-              <a:rPr lang="en-GB"/>
-              <a:t>Thank  you</a:t>
-            </a:r>
-          </a:p>
-        </p:txBody>
-      </p:sp>
-      <p:sp>
-        <p:nvSpPr>
-          <p:cNvPr id="4" name="Footer Placeholder 3">
-            <a:extLst>
-              <a:ext uri="{FF2B5EF4-FFF2-40B4-BE49-F238E27FC236}">
-                <a16:creationId xmlns:a16="http://schemas.microsoft.com/office/drawing/2014/main" id="{7607A1BE-CAD5-A65B-84C1-A71A2631A060}"/>
+              <a:rPr lang="en-IN" dirty="0"/>
+              <a:t>Electronic Control</a:t>
+            </a:r>
+          </a:p>
+        </p:txBody>
+      </p:sp>
+      <p:sp>
+        <p:nvSpPr>
+          <p:cNvPr id="6" name="Content Placeholder 5">
+            <a:extLst>
+              <a:ext uri="{FF2B5EF4-FFF2-40B4-BE49-F238E27FC236}">
+                <a16:creationId xmlns:a16="http://schemas.microsoft.com/office/drawing/2014/main" id="{2470D853-9BA7-856C-FCB2-938873FB2AEE}"/>
+              </a:ext>
+            </a:extLst>
+          </p:cNvPr>
+          <p:cNvSpPr>
+            <a:spLocks noGrp="1"/>
+          </p:cNvSpPr>
+          <p:nvPr>
+            <p:ph sz="quarter" idx="4"/>
+          </p:nvPr>
+        </p:nvSpPr>
+        <p:spPr>
+          <a:xfrm>
+            <a:off x="4629150" y="1427391"/>
+            <a:ext cx="3887391" cy="3423777"/>
+          </a:xfrm>
+        </p:spPr>
+        <p:txBody>
+          <a:bodyPr>
+            <a:normAutofit fontScale="85000" lnSpcReduction="10000"/>
+          </a:bodyPr>
+          <a:lstStyle/>
+          <a:p>
+            <a:r>
+              <a:rPr lang="en-IN" sz="1900" dirty="0"/>
+              <a:t>Uses </a:t>
+            </a:r>
+            <a:r>
+              <a:rPr lang="en-IN" sz="1900" b="1" dirty="0"/>
+              <a:t>ECU-controlled fuel injection system</a:t>
+            </a:r>
+            <a:endParaRPr lang="en-IN" sz="1900" dirty="0"/>
+          </a:p>
+          <a:p>
+            <a:r>
+              <a:rPr lang="en-IN" sz="1900" dirty="0"/>
+              <a:t>ECU collects data from </a:t>
+            </a:r>
+            <a:r>
+              <a:rPr lang="en-IN" sz="1900" b="1" dirty="0"/>
+              <a:t>sensors</a:t>
+            </a:r>
+            <a:r>
+              <a:rPr lang="en-IN" sz="1900" dirty="0"/>
+              <a:t> (pedal position, temperature, engine speed)</a:t>
+            </a:r>
+          </a:p>
+          <a:p>
+            <a:r>
+              <a:rPr lang="en-IN" sz="1900" dirty="0"/>
+              <a:t>Uses </a:t>
+            </a:r>
+            <a:r>
+              <a:rPr lang="en-IN" sz="1900" b="1" dirty="0"/>
+              <a:t>algorithms to calculate exact fuel needed</a:t>
+            </a:r>
+            <a:endParaRPr lang="en-IN" sz="1900" dirty="0"/>
+          </a:p>
+          <a:p>
+            <a:r>
+              <a:rPr lang="en-IN" sz="1900" dirty="0"/>
+              <a:t>Controls </a:t>
+            </a:r>
+            <a:r>
+              <a:rPr lang="en-IN" sz="1900" b="1" dirty="0"/>
+              <a:t>fuel injectors precisely</a:t>
+            </a:r>
+            <a:endParaRPr lang="en-IN" sz="1900" dirty="0"/>
+          </a:p>
+          <a:p>
+            <a:r>
+              <a:rPr lang="en-IN" sz="1900" dirty="0"/>
+              <a:t>Results in </a:t>
+            </a:r>
+            <a:r>
+              <a:rPr lang="en-IN" sz="1900" b="1" dirty="0"/>
+              <a:t>better fuel efficiency, performance, and reduced emissions</a:t>
+            </a:r>
+            <a:br>
+              <a:rPr lang="en-GB" sz="1600" dirty="0"/>
+            </a:br>
+            <a:endParaRPr lang="en-IN" sz="1600" dirty="0"/>
+          </a:p>
+        </p:txBody>
+      </p:sp>
+      <p:sp>
+        <p:nvSpPr>
+          <p:cNvPr id="8" name="Footer Placeholder 7">
+            <a:extLst>
+              <a:ext uri="{FF2B5EF4-FFF2-40B4-BE49-F238E27FC236}">
+                <a16:creationId xmlns:a16="http://schemas.microsoft.com/office/drawing/2014/main" id="{7FE27AD8-C0AD-79D5-A27A-CBC5BF863AA8}"/>
               </a:ext>
             </a:extLst>
           </p:cNvPr>
@@ -5121,37 +6129,231 @@
       </p:sp>
       <p:sp>
         <p:nvSpPr>
-          <p:cNvPr id="5" name="Slide Number Placeholder 4">
-            <a:extLst>
-              <a:ext uri="{FF2B5EF4-FFF2-40B4-BE49-F238E27FC236}">
-                <a16:creationId xmlns:a16="http://schemas.microsoft.com/office/drawing/2014/main" id="{F2574BCB-DBCB-972E-D836-6B3AC89FDFAE}"/>
-              </a:ext>
-            </a:extLst>
-          </p:cNvPr>
-          <p:cNvSpPr>
-            <a:spLocks noGrp="1"/>
-          </p:cNvSpPr>
-          <p:nvPr>
-            <p:ph type="sldNum" sz="quarter" idx="12"/>
-          </p:nvPr>
-        </p:nvSpPr>
-        <p:spPr/>
+          <p:cNvPr id="3" name="Text Placeholder 2">
+            <a:extLst>
+              <a:ext uri="{FF2B5EF4-FFF2-40B4-BE49-F238E27FC236}">
+                <a16:creationId xmlns:a16="http://schemas.microsoft.com/office/drawing/2014/main" id="{4D1F2DED-9E0D-DBCE-4453-E91CE4878DC9}"/>
+              </a:ext>
+            </a:extLst>
+          </p:cNvPr>
+          <p:cNvSpPr>
+            <a:spLocks noGrp="1"/>
+          </p:cNvSpPr>
+          <p:nvPr>
+            <p:ph type="body" idx="1"/>
+          </p:nvPr>
+        </p:nvSpPr>
+        <p:spPr>
+          <a:xfrm>
+            <a:off x="536538" y="603479"/>
+            <a:ext cx="3961644" cy="657225"/>
+          </a:xfrm>
+        </p:spPr>
         <p:txBody>
           <a:bodyPr/>
           <a:lstStyle/>
           <a:p>
-            <a:fld id="{E30AF5A0-43BB-4336-8627-9123B9144D80}" type="slidenum">
-              <a:rPr lang="en-US" dirty="0"/>
-              <a:t>9</a:t>
-            </a:fld>
-            <a:endParaRPr lang="en-US"/>
-          </a:p>
-        </p:txBody>
-      </p:sp>
+            <a:r>
+              <a:rPr lang="en-IN" dirty="0"/>
+              <a:t>Mechanical Control</a:t>
+            </a:r>
+          </a:p>
+        </p:txBody>
+      </p:sp>
+      <p:sp>
+        <p:nvSpPr>
+          <p:cNvPr id="4" name="Content Placeholder 3">
+            <a:extLst>
+              <a:ext uri="{FF2B5EF4-FFF2-40B4-BE49-F238E27FC236}">
+                <a16:creationId xmlns:a16="http://schemas.microsoft.com/office/drawing/2014/main" id="{E0C4B597-B4B5-AF02-9F28-57543F5D85EB}"/>
+              </a:ext>
+            </a:extLst>
+          </p:cNvPr>
+          <p:cNvSpPr>
+            <a:spLocks noGrp="1"/>
+          </p:cNvSpPr>
+          <p:nvPr>
+            <p:ph sz="half" idx="2"/>
+          </p:nvPr>
+        </p:nvSpPr>
+        <p:spPr>
+          <a:xfrm>
+            <a:off x="536538" y="1427391"/>
+            <a:ext cx="3961644" cy="2839561"/>
+          </a:xfrm>
+        </p:spPr>
+        <p:txBody>
+          <a:bodyPr>
+            <a:normAutofit fontScale="85000" lnSpcReduction="10000"/>
+          </a:bodyPr>
+          <a:lstStyle/>
+          <a:p>
+            <a:r>
+              <a:rPr lang="en-GB" sz="1900" dirty="0"/>
+              <a:t>Uses a </a:t>
+            </a:r>
+            <a:r>
+              <a:rPr lang="en-GB" sz="1900" b="1" dirty="0" err="1"/>
+              <a:t>carburetor</a:t>
+            </a:r>
+            <a:r>
+              <a:rPr lang="en-GB" sz="1900" dirty="0"/>
+              <a:t> to mix air and fuel</a:t>
+            </a:r>
+          </a:p>
+          <a:p>
+            <a:r>
+              <a:rPr lang="en-GB" sz="1900" dirty="0"/>
+              <a:t>Air passing through a narrow section (</a:t>
+            </a:r>
+            <a:r>
+              <a:rPr lang="en-GB" sz="1900" b="1" dirty="0"/>
+              <a:t>venturi</a:t>
+            </a:r>
+            <a:r>
+              <a:rPr lang="en-GB" sz="1900" dirty="0"/>
+              <a:t>) creates suction to pull fuel</a:t>
+            </a:r>
+          </a:p>
+          <a:p>
+            <a:r>
+              <a:rPr lang="en-GB" sz="1900" dirty="0"/>
+              <a:t>Fuel amount depends on </a:t>
+            </a:r>
+            <a:r>
+              <a:rPr lang="en-GB" sz="1900" b="1" dirty="0"/>
+              <a:t>throttle position (accelerator pedal)</a:t>
+            </a:r>
+            <a:endParaRPr lang="en-GB" sz="1900" dirty="0"/>
+          </a:p>
+          <a:p>
+            <a:r>
+              <a:rPr lang="en-GB" sz="1900" dirty="0"/>
+              <a:t>System is </a:t>
+            </a:r>
+            <a:r>
+              <a:rPr lang="en-GB" sz="1900" b="1" dirty="0"/>
+              <a:t>fully mechanical</a:t>
+            </a:r>
+            <a:r>
+              <a:rPr lang="en-GB" sz="1900" dirty="0"/>
+              <a:t>, with less accuracy</a:t>
+            </a:r>
+          </a:p>
+          <a:p>
+            <a:r>
+              <a:rPr lang="en-GB" sz="1900" dirty="0"/>
+              <a:t>Results in </a:t>
+            </a:r>
+            <a:r>
+              <a:rPr lang="en-GB" sz="1900" b="1" dirty="0"/>
+              <a:t>lower efficiency and higher fuel consumption</a:t>
+            </a:r>
+            <a:endParaRPr lang="en-GB" sz="1900" dirty="0"/>
+          </a:p>
+          <a:p>
+            <a:endParaRPr lang="en-IN" dirty="0"/>
+          </a:p>
+        </p:txBody>
+      </p:sp>
+      <p:pic>
+        <p:nvPicPr>
+          <p:cNvPr id="1030" name="Picture 6">
+            <a:extLst>
+              <a:ext uri="{FF2B5EF4-FFF2-40B4-BE49-F238E27FC236}">
+                <a16:creationId xmlns:a16="http://schemas.microsoft.com/office/drawing/2014/main" id="{70D91DC5-EC98-3099-00E6-3BFFE95261AF}"/>
+              </a:ext>
+            </a:extLst>
+          </p:cNvPr>
+          <p:cNvPicPr>
+            <a:picLocks noChangeAspect="1" noChangeArrowheads="1"/>
+          </p:cNvPicPr>
+          <p:nvPr/>
+        </p:nvPicPr>
+        <p:blipFill rotWithShape="1">
+          <a:blip r:embed="rId2">
+            <a:extLst>
+              <a:ext uri="{28A0092B-C50C-407E-A947-70E740481C1C}">
+                <a14:useLocalDpi xmlns:a14="http://schemas.microsoft.com/office/drawing/2010/main" val="0"/>
+              </a:ext>
+            </a:extLst>
+          </a:blip>
+          <a:srcRect t="8575" b="17306"/>
+          <a:stretch>
+            <a:fillRect/>
+          </a:stretch>
+        </p:blipFill>
+        <p:spPr bwMode="auto">
+          <a:xfrm>
+            <a:off x="5409188" y="4419352"/>
+            <a:ext cx="2327313" cy="1611334"/>
+          </a:xfrm>
+          <a:prstGeom prst="rect">
+            <a:avLst/>
+          </a:prstGeom>
+          <a:noFill/>
+          <a:extLst>
+            <a:ext uri="{909E8E84-426E-40DD-AFC4-6F175D3DCCD1}">
+              <a14:hiddenFill xmlns:a14="http://schemas.microsoft.com/office/drawing/2010/main">
+                <a:solidFill>
+                  <a:srgbClr val="FFFFFF"/>
+                </a:solidFill>
+              </a14:hiddenFill>
+            </a:ext>
+          </a:extLst>
+        </p:spPr>
+      </p:pic>
+      <p:pic>
+        <p:nvPicPr>
+          <p:cNvPr id="1026" name="Picture 2" descr="Carburetor">
+            <a:extLst>
+              <a:ext uri="{FF2B5EF4-FFF2-40B4-BE49-F238E27FC236}">
+                <a16:creationId xmlns:a16="http://schemas.microsoft.com/office/drawing/2014/main" id="{885959AB-7087-D7CF-FAF7-CDFC2ED5BDB4}"/>
+              </a:ext>
+            </a:extLst>
+          </p:cNvPr>
+          <p:cNvPicPr>
+            <a:picLocks noChangeAspect="1" noChangeArrowheads="1"/>
+          </p:cNvPicPr>
+          <p:nvPr/>
+        </p:nvPicPr>
+        <p:blipFill>
+          <a:blip r:embed="rId3">
+            <a:extLst>
+              <a:ext uri="{28A0092B-C50C-407E-A947-70E740481C1C}">
+                <a14:useLocalDpi xmlns:a14="http://schemas.microsoft.com/office/drawing/2010/main" val="0"/>
+              </a:ext>
+            </a:extLst>
+          </a:blip>
+          <a:srcRect/>
+          <a:stretch>
+            <a:fillRect/>
+          </a:stretch>
+        </p:blipFill>
+        <p:spPr bwMode="auto">
+          <a:xfrm>
+            <a:off x="1353703" y="4182367"/>
+            <a:ext cx="2327313" cy="2327313"/>
+          </a:xfrm>
+          <a:prstGeom prst="rect">
+            <a:avLst/>
+          </a:prstGeom>
+          <a:noFill/>
+          <a:extLst>
+            <a:ext uri="{909E8E84-426E-40DD-AFC4-6F175D3DCCD1}">
+              <a14:hiddenFill xmlns:a14="http://schemas.microsoft.com/office/drawing/2010/main">
+                <a:solidFill>
+                  <a:srgbClr val="FFFFFF"/>
+                </a:solidFill>
+              </a14:hiddenFill>
+            </a:ext>
+          </a:extLst>
+        </p:spPr>
+      </p:pic>
     </p:spTree>
     <p:extLst>
       <p:ext uri="{BB962C8B-B14F-4D97-AF65-F5344CB8AC3E}">
-        <p14:creationId xmlns:p14="http://schemas.microsoft.com/office/powerpoint/2010/main" val="396732684"/>
+        <p14:creationId xmlns:p14="http://schemas.microsoft.com/office/powerpoint/2010/main" val="3988782437"/>
       </p:ext>
     </p:extLst>
   </p:cSld>

--- a/Basics_of_Automotive.pptx
+++ b/Basics_of_Automotive.pptx
@@ -147,7 +147,7 @@
   <pc:docChgLst>
     <pc:chgData name="Sutar, Monal Gajanan (Cognizant)" userId="cbef091d-1278-48f6-97ae-0b476c410a24" providerId="ADAL" clId="{69AB6919-4147-41D2-8237-888729AF7CC5}"/>
     <pc:docChg chg="undo custSel addSld delSld modSld sldOrd">
-      <pc:chgData name="Sutar, Monal Gajanan (Cognizant)" userId="cbef091d-1278-48f6-97ae-0b476c410a24" providerId="ADAL" clId="{69AB6919-4147-41D2-8237-888729AF7CC5}" dt="2026-05-28T09:22:34.061" v="452" actId="14100"/>
+      <pc:chgData name="Sutar, Monal Gajanan (Cognizant)" userId="cbef091d-1278-48f6-97ae-0b476c410a24" providerId="ADAL" clId="{69AB6919-4147-41D2-8237-888729AF7CC5}" dt="2026-05-28T09:32:19.315" v="462" actId="14100"/>
       <pc:docMkLst>
         <pc:docMk/>
       </pc:docMkLst>
@@ -206,7 +206,7 @@
         </pc:picChg>
       </pc:sldChg>
       <pc:sldChg chg="addSp delSp modSp mod modClrScheme chgLayout">
-        <pc:chgData name="Sutar, Monal Gajanan (Cognizant)" userId="cbef091d-1278-48f6-97ae-0b476c410a24" providerId="ADAL" clId="{69AB6919-4147-41D2-8237-888729AF7CC5}" dt="2026-05-28T09:22:34.061" v="452" actId="14100"/>
+        <pc:chgData name="Sutar, Monal Gajanan (Cognizant)" userId="cbef091d-1278-48f6-97ae-0b476c410a24" providerId="ADAL" clId="{69AB6919-4147-41D2-8237-888729AF7CC5}" dt="2026-05-28T09:32:19.315" v="462" actId="14100"/>
         <pc:sldMkLst>
           <pc:docMk/>
           <pc:sldMk cId="0" sldId="261"/>
@@ -220,7 +220,7 @@
           </ac:spMkLst>
         </pc:spChg>
         <pc:spChg chg="mod">
-          <ac:chgData name="Sutar, Monal Gajanan (Cognizant)" userId="cbef091d-1278-48f6-97ae-0b476c410a24" providerId="ADAL" clId="{69AB6919-4147-41D2-8237-888729AF7CC5}" dt="2026-05-28T09:22:34.061" v="452" actId="14100"/>
+          <ac:chgData name="Sutar, Monal Gajanan (Cognizant)" userId="cbef091d-1278-48f6-97ae-0b476c410a24" providerId="ADAL" clId="{69AB6919-4147-41D2-8237-888729AF7CC5}" dt="2026-05-28T09:32:19.315" v="462" actId="14100"/>
           <ac:spMkLst>
             <pc:docMk/>
             <pc:sldMk cId="0" sldId="261"/>
@@ -252,7 +252,7 @@
           </ac:spMkLst>
         </pc:spChg>
         <pc:picChg chg="mod">
-          <ac:chgData name="Sutar, Monal Gajanan (Cognizant)" userId="cbef091d-1278-48f6-97ae-0b476c410a24" providerId="ADAL" clId="{69AB6919-4147-41D2-8237-888729AF7CC5}" dt="2026-05-28T06:52:23.563" v="422" actId="1076"/>
+          <ac:chgData name="Sutar, Monal Gajanan (Cognizant)" userId="cbef091d-1278-48f6-97ae-0b476c410a24" providerId="ADAL" clId="{69AB6919-4147-41D2-8237-888729AF7CC5}" dt="2026-05-28T09:32:09.991" v="459" actId="1076"/>
           <ac:picMkLst>
             <pc:docMk/>
             <pc:sldMk cId="0" sldId="261"/>
@@ -5508,8 +5508,8 @@
         </p:nvSpPr>
         <p:spPr>
           <a:xfrm>
-            <a:off x="536539" y="1758569"/>
-            <a:ext cx="4560696" cy="4315659"/>
+            <a:off x="536538" y="1758569"/>
+            <a:ext cx="5102261" cy="4315659"/>
           </a:xfrm>
         </p:spPr>
         <p:txBody>
@@ -5524,14 +5524,14 @@
               </a:lnSpc>
             </a:pPr>
             <a:r>
-              <a:rPr lang="en-GB" sz="1400" b="1" dirty="0"/>
+              <a:rPr lang="en-GB" sz="1600" b="1" dirty="0"/>
               <a:t>Microcontroller</a:t>
             </a:r>
             <a:br>
-              <a:rPr lang="en-GB" sz="1400" dirty="0"/>
+              <a:rPr lang="en-GB" sz="1600" dirty="0"/>
             </a:br>
             <a:r>
-              <a:rPr lang="en-GB" sz="1400" dirty="0"/>
+              <a:rPr lang="en-GB" sz="1600" dirty="0"/>
               <a:t>Small computer that makes decisions</a:t>
             </a:r>
           </a:p>
@@ -5542,14 +5542,14 @@
               </a:lnSpc>
             </a:pPr>
             <a:r>
-              <a:rPr lang="en-GB" sz="1400" b="1" dirty="0"/>
+              <a:rPr lang="en-GB" sz="1600" b="1" dirty="0"/>
               <a:t>Memory</a:t>
             </a:r>
             <a:br>
-              <a:rPr lang="en-GB" sz="1400" dirty="0"/>
+              <a:rPr lang="en-GB" sz="1600" dirty="0"/>
             </a:br>
             <a:r>
-              <a:rPr lang="en-GB" sz="1400" dirty="0"/>
+              <a:rPr lang="en-GB" sz="1600" dirty="0"/>
               <a:t>Stores data and programs (RAM, EEPROM, Flash)</a:t>
             </a:r>
           </a:p>
@@ -5560,21 +5560,21 @@
               </a:lnSpc>
             </a:pPr>
             <a:r>
-              <a:rPr lang="en-GB" sz="1400" b="1" dirty="0"/>
+              <a:rPr lang="en-GB" sz="1600" b="1" dirty="0"/>
               <a:t>Communication</a:t>
             </a:r>
             <a:br>
-              <a:rPr lang="en-GB" sz="1400" dirty="0"/>
+              <a:rPr lang="en-GB" sz="1600" dirty="0"/>
             </a:br>
             <a:r>
-              <a:rPr lang="en-GB" sz="1400" dirty="0"/>
+              <a:rPr lang="en-GB" sz="1600" dirty="0"/>
               <a:t>Connects with other ECUs using </a:t>
             </a:r>
             <a:r>
-              <a:rPr lang="en-GB" sz="1400" b="1" dirty="0"/>
+              <a:rPr lang="en-GB" sz="1600" b="1" dirty="0"/>
               <a:t>CAN, K-Line, etc.</a:t>
             </a:r>
-            <a:endParaRPr lang="en-GB" sz="1400" dirty="0"/>
+            <a:endParaRPr lang="en-GB" sz="1600" dirty="0"/>
           </a:p>
           <a:p>
             <a:pPr>
@@ -5583,22 +5583,22 @@
               </a:lnSpc>
             </a:pPr>
             <a:r>
-              <a:rPr lang="en-GB" sz="1400" b="1" dirty="0"/>
+              <a:rPr lang="en-GB" sz="1600" b="1" dirty="0"/>
               <a:t>Software</a:t>
             </a:r>
             <a:br>
-              <a:rPr lang="en-GB" sz="1400" dirty="0"/>
+              <a:rPr lang="en-GB" sz="1600" dirty="0"/>
             </a:br>
             <a:r>
-              <a:rPr lang="en-GB" sz="1400" dirty="0"/>
+              <a:rPr lang="en-GB" sz="1600" dirty="0"/>
               <a:t>Includes </a:t>
             </a:r>
             <a:r>
-              <a:rPr lang="en-GB" sz="1400" b="1" dirty="0"/>
+              <a:rPr lang="en-GB" sz="1600" b="1" dirty="0"/>
               <a:t>Bootloader and Application Software</a:t>
             </a:r>
             <a:r>
-              <a:rPr lang="en-GB" sz="1400" dirty="0"/>
+              <a:rPr lang="en-GB" sz="1600" dirty="0"/>
               <a:t> for control and processing</a:t>
             </a:r>
           </a:p>
@@ -5609,30 +5609,30 @@
               </a:lnSpc>
             </a:pPr>
             <a:r>
-              <a:rPr lang="en-GB" sz="1400" b="1" dirty="0"/>
+              <a:rPr lang="en-GB" sz="1600" b="1" dirty="0"/>
               <a:t>Inputs</a:t>
             </a:r>
             <a:br>
-              <a:rPr lang="en-GB" sz="1400" dirty="0"/>
+              <a:rPr lang="en-GB" sz="1600" dirty="0"/>
             </a:br>
             <a:r>
-              <a:rPr lang="en-GB" sz="1400" dirty="0"/>
+              <a:rPr lang="en-GB" sz="1600" dirty="0"/>
               <a:t>Receives signals from </a:t>
             </a:r>
             <a:r>
-              <a:rPr lang="en-GB" sz="1400" b="1" dirty="0"/>
+              <a:rPr lang="en-GB" sz="1600" b="1" dirty="0"/>
               <a:t>sensors and other ECUs</a:t>
             </a:r>
             <a:r>
-              <a:rPr lang="en-GB" sz="1400" dirty="0"/>
+              <a:rPr lang="en-GB" sz="1600" dirty="0"/>
               <a:t> (</a:t>
             </a:r>
             <a:r>
-              <a:rPr lang="en-GB" sz="1400" dirty="0" err="1"/>
+              <a:rPr lang="en-GB" sz="1600" dirty="0" err="1"/>
               <a:t>analog</a:t>
             </a:r>
             <a:r>
-              <a:rPr lang="en-GB" sz="1400" dirty="0"/>
+              <a:rPr lang="en-GB" sz="1600" dirty="0"/>
               <a:t>/digital)</a:t>
             </a:r>
           </a:p>
@@ -5643,22 +5643,22 @@
               </a:lnSpc>
             </a:pPr>
             <a:r>
-              <a:rPr lang="en-GB" sz="1400" b="1" dirty="0"/>
+              <a:rPr lang="en-GB" sz="1600" b="1" dirty="0"/>
               <a:t>Outputs</a:t>
             </a:r>
             <a:br>
-              <a:rPr lang="en-GB" sz="1400" dirty="0"/>
+              <a:rPr lang="en-GB" sz="1600" dirty="0"/>
             </a:br>
             <a:r>
-              <a:rPr lang="en-GB" sz="1400" dirty="0"/>
+              <a:rPr lang="en-GB" sz="1600" dirty="0"/>
               <a:t>Sends commands to </a:t>
             </a:r>
             <a:r>
-              <a:rPr lang="en-GB" sz="1400" b="1" dirty="0"/>
+              <a:rPr lang="en-GB" sz="1600" b="1" dirty="0"/>
               <a:t>actuators</a:t>
             </a:r>
             <a:r>
-              <a:rPr lang="en-GB" sz="1400" dirty="0"/>
+              <a:rPr lang="en-GB" sz="1600" dirty="0"/>
               <a:t> to perform actions</a:t>
             </a:r>
           </a:p>
@@ -5696,8 +5696,8 @@
         </p:blipFill>
         <p:spPr>
           <a:xfrm>
-            <a:off x="5097235" y="3366449"/>
-            <a:ext cx="3914775" cy="2606649"/>
+            <a:off x="5388605" y="3648256"/>
+            <a:ext cx="3483429" cy="2319438"/>
           </a:xfrm>
           <a:prstGeom prst="rect">
             <a:avLst/>
